--- a/content/docs/theory-analysis/envoy-configuration-xds/images/images.pptx
+++ b/content/docs/theory-analysis/envoy-configuration-xds/images/images.pptx
@@ -5,12 +5,13 @@
     <p:sldMasterId id="2147483648" r:id="rId1"/>
   </p:sldMasterIdLst>
   <p:notesMasterIdLst>
-    <p:notesMasterId r:id="rId5"/>
+    <p:notesMasterId r:id="rId6"/>
   </p:notesMasterIdLst>
   <p:sldIdLst>
     <p:sldId id="395" r:id="rId2"/>
     <p:sldId id="387" r:id="rId3"/>
-    <p:sldId id="396" r:id="rId4"/>
+    <p:sldId id="397" r:id="rId4"/>
+    <p:sldId id="396" r:id="rId5"/>
   </p:sldIdLst>
   <p:sldSz cx="9144000" cy="5143500" type="screen16x9"/>
   <p:notesSz cx="6858000" cy="9144000"/>
@@ -215,7 +216,7 @@
           <a:p>
             <a:fld id="{6CD5550B-26C4-49A9-A5BA-636EF7BE6CE9}" type="datetimeFigureOut">
               <a:rPr lang="ko-KR" altLang="en-US" smtClean="0"/>
-              <a:t>2026. 7. 20.</a:t>
+              <a:t>2026. 8. 13.</a:t>
             </a:fld>
             <a:endParaRPr lang="ko-KR" altLang="en-US"/>
           </a:p>
@@ -661,7 +662,7 @@
           <a:p>
             <a:fld id="{FB30EDBD-1C2D-4C1E-B459-B60219FAB484}" type="datetimeFigureOut">
               <a:rPr lang="ko-KR" altLang="en-US" smtClean="0"/>
-              <a:t>2026. 7. 20.</a:t>
+              <a:t>2026. 8. 13.</a:t>
             </a:fld>
             <a:endParaRPr lang="ko-KR" altLang="en-US"/>
           </a:p>
@@ -824,7 +825,7 @@
           <a:p>
             <a:fld id="{FB30EDBD-1C2D-4C1E-B459-B60219FAB484}" type="datetimeFigureOut">
               <a:rPr lang="ko-KR" altLang="en-US" smtClean="0"/>
-              <a:t>2026. 7. 20.</a:t>
+              <a:t>2026. 8. 13.</a:t>
             </a:fld>
             <a:endParaRPr lang="ko-KR" altLang="en-US"/>
           </a:p>
@@ -997,7 +998,7 @@
           <a:p>
             <a:fld id="{FB30EDBD-1C2D-4C1E-B459-B60219FAB484}" type="datetimeFigureOut">
               <a:rPr lang="ko-KR" altLang="en-US" smtClean="0"/>
-              <a:t>2026. 7. 20.</a:t>
+              <a:t>2026. 8. 13.</a:t>
             </a:fld>
             <a:endParaRPr lang="ko-KR" altLang="en-US"/>
           </a:p>
@@ -1160,7 +1161,7 @@
           <a:p>
             <a:fld id="{FB30EDBD-1C2D-4C1E-B459-B60219FAB484}" type="datetimeFigureOut">
               <a:rPr lang="ko-KR" altLang="en-US" smtClean="0"/>
-              <a:t>2026. 7. 20.</a:t>
+              <a:t>2026. 8. 13.</a:t>
             </a:fld>
             <a:endParaRPr lang="ko-KR" altLang="en-US"/>
           </a:p>
@@ -1400,7 +1401,7 @@
           <a:p>
             <a:fld id="{FB30EDBD-1C2D-4C1E-B459-B60219FAB484}" type="datetimeFigureOut">
               <a:rPr lang="ko-KR" altLang="en-US" smtClean="0"/>
-              <a:t>2026. 7. 20.</a:t>
+              <a:t>2026. 8. 13.</a:t>
             </a:fld>
             <a:endParaRPr lang="ko-KR" altLang="en-US"/>
           </a:p>
@@ -1680,7 +1681,7 @@
           <a:p>
             <a:fld id="{FB30EDBD-1C2D-4C1E-B459-B60219FAB484}" type="datetimeFigureOut">
               <a:rPr lang="ko-KR" altLang="en-US" smtClean="0"/>
-              <a:t>2026. 7. 20.</a:t>
+              <a:t>2026. 8. 13.</a:t>
             </a:fld>
             <a:endParaRPr lang="ko-KR" altLang="en-US"/>
           </a:p>
@@ -2094,7 +2095,7 @@
           <a:p>
             <a:fld id="{FB30EDBD-1C2D-4C1E-B459-B60219FAB484}" type="datetimeFigureOut">
               <a:rPr lang="ko-KR" altLang="en-US" smtClean="0"/>
-              <a:t>2026. 7. 20.</a:t>
+              <a:t>2026. 8. 13.</a:t>
             </a:fld>
             <a:endParaRPr lang="ko-KR" altLang="en-US"/>
           </a:p>
@@ -2206,7 +2207,7 @@
           <a:p>
             <a:fld id="{FB30EDBD-1C2D-4C1E-B459-B60219FAB484}" type="datetimeFigureOut">
               <a:rPr lang="ko-KR" altLang="en-US" smtClean="0"/>
-              <a:t>2026. 7. 20.</a:t>
+              <a:t>2026. 8. 13.</a:t>
             </a:fld>
             <a:endParaRPr lang="ko-KR" altLang="en-US"/>
           </a:p>
@@ -2296,7 +2297,7 @@
           <a:p>
             <a:fld id="{FB30EDBD-1C2D-4C1E-B459-B60219FAB484}" type="datetimeFigureOut">
               <a:rPr lang="ko-KR" altLang="en-US" smtClean="0"/>
-              <a:t>2026. 7. 20.</a:t>
+              <a:t>2026. 8. 13.</a:t>
             </a:fld>
             <a:endParaRPr lang="ko-KR" altLang="en-US"/>
           </a:p>
@@ -2566,7 +2567,7 @@
           <a:p>
             <a:fld id="{FB30EDBD-1C2D-4C1E-B459-B60219FAB484}" type="datetimeFigureOut">
               <a:rPr lang="ko-KR" altLang="en-US" smtClean="0"/>
-              <a:t>2026. 7. 20.</a:t>
+              <a:t>2026. 8. 13.</a:t>
             </a:fld>
             <a:endParaRPr lang="ko-KR" altLang="en-US"/>
           </a:p>
@@ -2813,7 +2814,7 @@
           <a:p>
             <a:fld id="{FB30EDBD-1C2D-4C1E-B459-B60219FAB484}" type="datetimeFigureOut">
               <a:rPr lang="ko-KR" altLang="en-US" smtClean="0"/>
-              <a:t>2026. 7. 20.</a:t>
+              <a:t>2026. 8. 13.</a:t>
             </a:fld>
             <a:endParaRPr lang="ko-KR" altLang="en-US"/>
           </a:p>
@@ -3019,7 +3020,7 @@
           <a:p>
             <a:fld id="{FB30EDBD-1C2D-4C1E-B459-B60219FAB484}" type="datetimeFigureOut">
               <a:rPr lang="ko-KR" altLang="en-US" smtClean="0"/>
-              <a:t>2026. 7. 20.</a:t>
+              <a:t>2026. 8. 13.</a:t>
             </a:fld>
             <a:endParaRPr lang="ko-KR" altLang="en-US"/>
           </a:p>
@@ -3409,7 +3410,7 @@
         </p:nvSpPr>
         <p:spPr>
           <a:xfrm>
-            <a:off x="1959512" y="531455"/>
+            <a:off x="202115" y="531455"/>
             <a:ext cx="1309186" cy="427639"/>
           </a:xfrm>
           <a:prstGeom prst="roundRect">
@@ -3699,7 +3700,7 @@
         <p:spPr>
           <a:xfrm>
             <a:off x="1959512" y="1736994"/>
-            <a:ext cx="1309186" cy="860591"/>
+            <a:ext cx="1309186" cy="933314"/>
           </a:xfrm>
           <a:prstGeom prst="roundRect">
             <a:avLst>
@@ -3791,6 +3792,21 @@
               <a:t>SDS: internal-cert</a:t>
             </a:r>
           </a:p>
+          <a:p>
+            <a:r>
+              <a:rPr kumimoji="1" lang="en-US" altLang="ko-KR" sz="800">
+                <a:solidFill>
+                  <a:schemeClr val="tx1"/>
+                </a:solidFill>
+              </a:rPr>
+              <a:t>ECDS: internal-wasm</a:t>
+            </a:r>
+            <a:endParaRPr kumimoji="1" lang="ko-KR" altLang="en-US" sz="800">
+              <a:solidFill>
+                <a:schemeClr val="tx1"/>
+              </a:solidFill>
+            </a:endParaRPr>
+          </a:p>
         </p:txBody>
       </p:sp>
       <p:sp>
@@ -4892,7 +4908,7 @@
         <p:spPr>
           <a:xfrm>
             <a:off x="1520329" y="1950815"/>
-            <a:ext cx="439183" cy="216475"/>
+            <a:ext cx="439183" cy="252836"/>
           </a:xfrm>
           <a:prstGeom prst="straightConnector1">
             <a:avLst/>
@@ -4937,8 +4953,8 @@
         </p:nvCxnSpPr>
         <p:spPr>
           <a:xfrm flipV="1">
-            <a:off x="1520329" y="2167290"/>
-            <a:ext cx="439183" cy="430296"/>
+            <a:off x="1520329" y="2203651"/>
+            <a:ext cx="439183" cy="393935"/>
           </a:xfrm>
           <a:prstGeom prst="straightConnector1">
             <a:avLst/>
@@ -5290,8 +5306,8 @@
         </p:nvCxnSpPr>
         <p:spPr>
           <a:xfrm>
-            <a:off x="3268698" y="2167290"/>
-            <a:ext cx="588913" cy="214515"/>
+            <a:off x="3268698" y="2203651"/>
+            <a:ext cx="588913" cy="178154"/>
           </a:xfrm>
           <a:prstGeom prst="straightConnector1">
             <a:avLst/>
@@ -5428,8 +5444,8 @@
         </p:nvCxnSpPr>
         <p:spPr>
           <a:xfrm>
-            <a:off x="3268698" y="2167290"/>
-            <a:ext cx="505659" cy="856028"/>
+            <a:off x="3268698" y="2203651"/>
+            <a:ext cx="505659" cy="819667"/>
           </a:xfrm>
           <a:prstGeom prst="straightConnector1">
             <a:avLst/>
@@ -6982,8 +6998,8 @@
         </p:nvCxnSpPr>
         <p:spPr>
           <a:xfrm rot="16200000" flipH="1">
-            <a:off x="3327806" y="245392"/>
-            <a:ext cx="500777" cy="1928179"/>
+            <a:off x="2449108" y="-633306"/>
+            <a:ext cx="500777" cy="3685576"/>
           </a:xfrm>
           <a:prstGeom prst="bentConnector3">
             <a:avLst>
@@ -7030,8 +7046,8 @@
         </p:nvCxnSpPr>
         <p:spPr>
           <a:xfrm rot="16200000" flipH="1">
-            <a:off x="4291895" y="-718697"/>
-            <a:ext cx="500777" cy="3856357"/>
+            <a:off x="3413197" y="-1597395"/>
+            <a:ext cx="500777" cy="5613754"/>
           </a:xfrm>
           <a:prstGeom prst="bentConnector3">
             <a:avLst>
@@ -7078,8 +7094,8 @@
         </p:nvCxnSpPr>
         <p:spPr>
           <a:xfrm rot="16200000" flipH="1">
-            <a:off x="5167272" y="-1594073"/>
-            <a:ext cx="500777" cy="5607110"/>
+            <a:off x="4288573" y="-2472772"/>
+            <a:ext cx="500777" cy="7364507"/>
           </a:xfrm>
           <a:prstGeom prst="bentConnector3">
             <a:avLst>
@@ -7110,27 +7126,29 @@
       </p:cxnSp>
       <p:cxnSp>
         <p:nvCxnSpPr>
-          <p:cNvPr id="342" name="직선 화살표 연결선 341">
-            <a:extLst>
-              <a:ext uri="{FF2B5EF4-FFF2-40B4-BE49-F238E27FC236}">
-                <a16:creationId xmlns:a16="http://schemas.microsoft.com/office/drawing/2014/main" id="{12DF25FD-3B5D-9130-BBFA-55EDB10C5AF6}"/>
+          <p:cNvPr id="345" name="꺾인 연결선[E] 344">
+            <a:extLst>
+              <a:ext uri="{FF2B5EF4-FFF2-40B4-BE49-F238E27FC236}">
+                <a16:creationId xmlns:a16="http://schemas.microsoft.com/office/drawing/2014/main" id="{BE864410-2614-615A-10C1-A896D8626C23}"/>
               </a:ext>
             </a:extLst>
           </p:cNvPr>
           <p:cNvCxnSpPr>
             <a:cxnSpLocks/>
             <a:stCxn id="12" idx="2"/>
-            <a:endCxn id="8" idx="0"/>
+            <a:endCxn id="321" idx="2"/>
           </p:cNvCxnSpPr>
           <p:nvPr/>
         </p:nvCxnSpPr>
         <p:spPr>
-          <a:xfrm>
-            <a:off x="2614105" y="959094"/>
-            <a:ext cx="1" cy="500777"/>
-          </a:xfrm>
-          <a:prstGeom prst="straightConnector1">
-            <a:avLst/>
+          <a:xfrm rot="16200000" flipH="1">
+            <a:off x="3764194" y="-1948393"/>
+            <a:ext cx="17287" cy="5832259"/>
+          </a:xfrm>
+          <a:prstGeom prst="bentConnector3">
+            <a:avLst>
+              <a:gd name="adj1" fmla="val 1422381"/>
+            </a:avLst>
           </a:prstGeom>
           <a:ln w="12700">
             <a:solidFill>
@@ -7154,30 +7172,416 @@
           </a:fontRef>
         </p:style>
       </p:cxnSp>
+      <p:sp>
+        <p:nvSpPr>
+          <p:cNvPr id="357" name="모서리가 둥근 직사각형 356">
+            <a:extLst>
+              <a:ext uri="{FF2B5EF4-FFF2-40B4-BE49-F238E27FC236}">
+                <a16:creationId xmlns:a16="http://schemas.microsoft.com/office/drawing/2014/main" id="{98B9172A-F9FA-1B03-2E93-451F5EA733A8}"/>
+              </a:ext>
+            </a:extLst>
+          </p:cNvPr>
+          <p:cNvSpPr/>
+          <p:nvPr/>
+        </p:nvSpPr>
+        <p:spPr>
+          <a:xfrm>
+            <a:off x="856708" y="957216"/>
+            <a:ext cx="1164463" cy="185590"/>
+          </a:xfrm>
+          <a:prstGeom prst="roundRect">
+            <a:avLst>
+              <a:gd name="adj" fmla="val 12191"/>
+            </a:avLst>
+          </a:prstGeom>
+          <a:noFill/>
+          <a:ln w="12700">
+            <a:noFill/>
+          </a:ln>
+        </p:spPr>
+        <p:style>
+          <a:lnRef idx="2">
+            <a:schemeClr val="accent1">
+              <a:shade val="15000"/>
+            </a:schemeClr>
+          </a:lnRef>
+          <a:fillRef idx="1">
+            <a:schemeClr val="accent1"/>
+          </a:fillRef>
+          <a:effectRef idx="0">
+            <a:schemeClr val="accent1"/>
+          </a:effectRef>
+          <a:fontRef idx="minor">
+            <a:schemeClr val="lt1"/>
+          </a:fontRef>
+        </p:style>
+        <p:txBody>
+          <a:bodyPr rtlCol="0" anchor="ctr"/>
+          <a:lstStyle/>
+          <a:p>
+            <a:r>
+              <a:rPr kumimoji="1" lang="en-US" altLang="ko-KR" sz="800" i="1">
+                <a:solidFill>
+                  <a:schemeClr val="tx1"/>
+                </a:solidFill>
+              </a:rPr>
+              <a:t>1 Stream with </a:t>
+            </a:r>
+            <a:r>
+              <a:rPr kumimoji="1" lang="en-US" altLang="ko-KR" sz="800" b="1" i="1" u="sng">
+                <a:solidFill>
+                  <a:schemeClr val="tx1"/>
+                </a:solidFill>
+              </a:rPr>
+              <a:t>ADS </a:t>
+            </a:r>
+            <a:endParaRPr kumimoji="1" lang="ko-KR" altLang="en-US" sz="800" b="1" i="1" u="sng">
+              <a:solidFill>
+                <a:schemeClr val="tx1"/>
+              </a:solidFill>
+            </a:endParaRPr>
+          </a:p>
+        </p:txBody>
+      </p:sp>
+      <p:sp>
+        <p:nvSpPr>
+          <p:cNvPr id="358" name="모서리가 둥근 직사각형 357">
+            <a:extLst>
+              <a:ext uri="{FF2B5EF4-FFF2-40B4-BE49-F238E27FC236}">
+                <a16:creationId xmlns:a16="http://schemas.microsoft.com/office/drawing/2014/main" id="{EB9408EA-B995-1C5C-656D-49D8F8A4C605}"/>
+              </a:ext>
+            </a:extLst>
+          </p:cNvPr>
+          <p:cNvSpPr/>
+          <p:nvPr/>
+        </p:nvSpPr>
+        <p:spPr>
+          <a:xfrm>
+            <a:off x="2608929" y="1272082"/>
+            <a:ext cx="1164463" cy="185590"/>
+          </a:xfrm>
+          <a:prstGeom prst="roundRect">
+            <a:avLst>
+              <a:gd name="adj" fmla="val 12191"/>
+            </a:avLst>
+          </a:prstGeom>
+          <a:noFill/>
+          <a:ln w="12700">
+            <a:noFill/>
+          </a:ln>
+        </p:spPr>
+        <p:style>
+          <a:lnRef idx="2">
+            <a:schemeClr val="accent1">
+              <a:shade val="15000"/>
+            </a:schemeClr>
+          </a:lnRef>
+          <a:fillRef idx="1">
+            <a:schemeClr val="accent1"/>
+          </a:fillRef>
+          <a:effectRef idx="0">
+            <a:schemeClr val="accent1"/>
+          </a:effectRef>
+          <a:fontRef idx="minor">
+            <a:schemeClr val="lt1"/>
+          </a:fontRef>
+        </p:style>
+        <p:txBody>
+          <a:bodyPr rtlCol="0" anchor="ctr"/>
+          <a:lstStyle/>
+          <a:p>
+            <a:r>
+              <a:rPr kumimoji="1" lang="en-US" altLang="ko-KR" sz="800" b="1" i="1" u="sng">
+                <a:solidFill>
+                  <a:schemeClr val="tx1"/>
+                </a:solidFill>
+              </a:rPr>
+              <a:t>LDS</a:t>
+            </a:r>
+            <a:endParaRPr kumimoji="1" lang="ko-KR" altLang="en-US" sz="800" b="1" i="1" u="sng">
+              <a:solidFill>
+                <a:schemeClr val="tx1"/>
+              </a:solidFill>
+            </a:endParaRPr>
+          </a:p>
+        </p:txBody>
+      </p:sp>
+      <p:sp>
+        <p:nvSpPr>
+          <p:cNvPr id="359" name="모서리가 둥근 직사각형 358">
+            <a:extLst>
+              <a:ext uri="{FF2B5EF4-FFF2-40B4-BE49-F238E27FC236}">
+                <a16:creationId xmlns:a16="http://schemas.microsoft.com/office/drawing/2014/main" id="{FF0423B0-19B3-5AA0-BE1E-DF5FFBDC5025}"/>
+              </a:ext>
+            </a:extLst>
+          </p:cNvPr>
+          <p:cNvSpPr/>
+          <p:nvPr/>
+        </p:nvSpPr>
+        <p:spPr>
+          <a:xfrm>
+            <a:off x="4537559" y="1272082"/>
+            <a:ext cx="1164463" cy="185590"/>
+          </a:xfrm>
+          <a:prstGeom prst="roundRect">
+            <a:avLst>
+              <a:gd name="adj" fmla="val 12191"/>
+            </a:avLst>
+          </a:prstGeom>
+          <a:noFill/>
+          <a:ln w="12700">
+            <a:noFill/>
+          </a:ln>
+        </p:spPr>
+        <p:style>
+          <a:lnRef idx="2">
+            <a:schemeClr val="accent1">
+              <a:shade val="15000"/>
+            </a:schemeClr>
+          </a:lnRef>
+          <a:fillRef idx="1">
+            <a:schemeClr val="accent1"/>
+          </a:fillRef>
+          <a:effectRef idx="0">
+            <a:schemeClr val="accent1"/>
+          </a:effectRef>
+          <a:fontRef idx="minor">
+            <a:schemeClr val="lt1"/>
+          </a:fontRef>
+        </p:style>
+        <p:txBody>
+          <a:bodyPr rtlCol="0" anchor="ctr"/>
+          <a:lstStyle/>
+          <a:p>
+            <a:r>
+              <a:rPr kumimoji="1" lang="en-US" altLang="ko-KR" sz="800" b="1" i="1" u="sng">
+                <a:solidFill>
+                  <a:schemeClr val="tx1"/>
+                </a:solidFill>
+              </a:rPr>
+              <a:t>RDS</a:t>
+            </a:r>
+            <a:endParaRPr kumimoji="1" lang="ko-KR" altLang="en-US" sz="800" b="1" i="1" u="sng">
+              <a:solidFill>
+                <a:schemeClr val="tx1"/>
+              </a:solidFill>
+            </a:endParaRPr>
+          </a:p>
+        </p:txBody>
+      </p:sp>
+      <p:sp>
+        <p:nvSpPr>
+          <p:cNvPr id="360" name="모서리가 둥근 직사각형 359">
+            <a:extLst>
+              <a:ext uri="{FF2B5EF4-FFF2-40B4-BE49-F238E27FC236}">
+                <a16:creationId xmlns:a16="http://schemas.microsoft.com/office/drawing/2014/main" id="{661D18C1-B650-C449-EADD-11E008B59FCC}"/>
+              </a:ext>
+            </a:extLst>
+          </p:cNvPr>
+          <p:cNvSpPr/>
+          <p:nvPr/>
+        </p:nvSpPr>
+        <p:spPr>
+          <a:xfrm>
+            <a:off x="6467874" y="1272082"/>
+            <a:ext cx="1164463" cy="185590"/>
+          </a:xfrm>
+          <a:prstGeom prst="roundRect">
+            <a:avLst>
+              <a:gd name="adj" fmla="val 12191"/>
+            </a:avLst>
+          </a:prstGeom>
+          <a:noFill/>
+          <a:ln w="12700">
+            <a:noFill/>
+          </a:ln>
+        </p:spPr>
+        <p:style>
+          <a:lnRef idx="2">
+            <a:schemeClr val="accent1">
+              <a:shade val="15000"/>
+            </a:schemeClr>
+          </a:lnRef>
+          <a:fillRef idx="1">
+            <a:schemeClr val="accent1"/>
+          </a:fillRef>
+          <a:effectRef idx="0">
+            <a:schemeClr val="accent1"/>
+          </a:effectRef>
+          <a:fontRef idx="minor">
+            <a:schemeClr val="lt1"/>
+          </a:fontRef>
+        </p:style>
+        <p:txBody>
+          <a:bodyPr rtlCol="0" anchor="ctr"/>
+          <a:lstStyle/>
+          <a:p>
+            <a:r>
+              <a:rPr kumimoji="1" lang="en-US" altLang="ko-KR" sz="800" b="1" i="1" u="sng">
+                <a:solidFill>
+                  <a:schemeClr val="tx1"/>
+                </a:solidFill>
+              </a:rPr>
+              <a:t>CDS</a:t>
+            </a:r>
+            <a:endParaRPr kumimoji="1" lang="ko-KR" altLang="en-US" sz="800" b="1" i="1" u="sng">
+              <a:solidFill>
+                <a:schemeClr val="tx1"/>
+              </a:solidFill>
+            </a:endParaRPr>
+          </a:p>
+        </p:txBody>
+      </p:sp>
+      <p:sp>
+        <p:nvSpPr>
+          <p:cNvPr id="361" name="모서리가 둥근 직사각형 360">
+            <a:extLst>
+              <a:ext uri="{FF2B5EF4-FFF2-40B4-BE49-F238E27FC236}">
+                <a16:creationId xmlns:a16="http://schemas.microsoft.com/office/drawing/2014/main" id="{0F07CD2D-FCD0-D83D-E3C3-A41C2C0EE441}"/>
+              </a:ext>
+            </a:extLst>
+          </p:cNvPr>
+          <p:cNvSpPr/>
+          <p:nvPr/>
+        </p:nvSpPr>
+        <p:spPr>
+          <a:xfrm>
+            <a:off x="8217834" y="1272082"/>
+            <a:ext cx="1164463" cy="185590"/>
+          </a:xfrm>
+          <a:prstGeom prst="roundRect">
+            <a:avLst>
+              <a:gd name="adj" fmla="val 12191"/>
+            </a:avLst>
+          </a:prstGeom>
+          <a:noFill/>
+          <a:ln w="12700">
+            <a:noFill/>
+          </a:ln>
+        </p:spPr>
+        <p:style>
+          <a:lnRef idx="2">
+            <a:schemeClr val="accent1">
+              <a:shade val="15000"/>
+            </a:schemeClr>
+          </a:lnRef>
+          <a:fillRef idx="1">
+            <a:schemeClr val="accent1"/>
+          </a:fillRef>
+          <a:effectRef idx="0">
+            <a:schemeClr val="accent1"/>
+          </a:effectRef>
+          <a:fontRef idx="minor">
+            <a:schemeClr val="lt1"/>
+          </a:fontRef>
+        </p:style>
+        <p:txBody>
+          <a:bodyPr rtlCol="0" anchor="ctr"/>
+          <a:lstStyle/>
+          <a:p>
+            <a:r>
+              <a:rPr kumimoji="1" lang="en-US" altLang="ko-KR" sz="800" b="1" i="1" u="sng">
+                <a:solidFill>
+                  <a:schemeClr val="tx1"/>
+                </a:solidFill>
+              </a:rPr>
+              <a:t>EDS</a:t>
+            </a:r>
+            <a:endParaRPr kumimoji="1" lang="ko-KR" altLang="en-US" sz="800" b="1" i="1" u="sng">
+              <a:solidFill>
+                <a:schemeClr val="tx1"/>
+              </a:solidFill>
+            </a:endParaRPr>
+          </a:p>
+        </p:txBody>
+      </p:sp>
+      <p:sp>
+        <p:nvSpPr>
+          <p:cNvPr id="362" name="모서리가 둥근 직사각형 361">
+            <a:extLst>
+              <a:ext uri="{FF2B5EF4-FFF2-40B4-BE49-F238E27FC236}">
+                <a16:creationId xmlns:a16="http://schemas.microsoft.com/office/drawing/2014/main" id="{CACB67CA-B4C4-6894-0E4A-93581DB4AFCF}"/>
+              </a:ext>
+            </a:extLst>
+          </p:cNvPr>
+          <p:cNvSpPr/>
+          <p:nvPr/>
+        </p:nvSpPr>
+        <p:spPr>
+          <a:xfrm>
+            <a:off x="6683791" y="973920"/>
+            <a:ext cx="1164463" cy="185590"/>
+          </a:xfrm>
+          <a:prstGeom prst="roundRect">
+            <a:avLst>
+              <a:gd name="adj" fmla="val 12191"/>
+            </a:avLst>
+          </a:prstGeom>
+          <a:noFill/>
+          <a:ln w="12700">
+            <a:noFill/>
+          </a:ln>
+        </p:spPr>
+        <p:style>
+          <a:lnRef idx="2">
+            <a:schemeClr val="accent1">
+              <a:shade val="15000"/>
+            </a:schemeClr>
+          </a:lnRef>
+          <a:fillRef idx="1">
+            <a:schemeClr val="accent1"/>
+          </a:fillRef>
+          <a:effectRef idx="0">
+            <a:schemeClr val="accent1"/>
+          </a:effectRef>
+          <a:fontRef idx="minor">
+            <a:schemeClr val="lt1"/>
+          </a:fontRef>
+        </p:style>
+        <p:txBody>
+          <a:bodyPr rtlCol="0" anchor="ctr"/>
+          <a:lstStyle/>
+          <a:p>
+            <a:r>
+              <a:rPr kumimoji="1" lang="en-US" altLang="ko-KR" sz="800" b="1" i="1" u="sng">
+                <a:solidFill>
+                  <a:schemeClr val="tx1"/>
+                </a:solidFill>
+              </a:rPr>
+              <a:t>SDS</a:t>
+            </a:r>
+            <a:endParaRPr kumimoji="1" lang="ko-KR" altLang="en-US" sz="800" b="1" i="1" u="sng">
+              <a:solidFill>
+                <a:schemeClr val="tx1"/>
+              </a:solidFill>
+            </a:endParaRPr>
+          </a:p>
+        </p:txBody>
+      </p:sp>
       <p:cxnSp>
         <p:nvCxnSpPr>
-          <p:cNvPr id="345" name="꺾인 연결선[E] 344">
-            <a:extLst>
-              <a:ext uri="{FF2B5EF4-FFF2-40B4-BE49-F238E27FC236}">
-                <a16:creationId xmlns:a16="http://schemas.microsoft.com/office/drawing/2014/main" id="{BE864410-2614-615A-10C1-A896D8626C23}"/>
+          <p:cNvPr id="20" name="꺾인 연결선[E] 19">
+            <a:extLst>
+              <a:ext uri="{FF2B5EF4-FFF2-40B4-BE49-F238E27FC236}">
+                <a16:creationId xmlns:a16="http://schemas.microsoft.com/office/drawing/2014/main" id="{11E262D5-52FF-601C-78F7-71B50E2BADDA}"/>
               </a:ext>
             </a:extLst>
           </p:cNvPr>
           <p:cNvCxnSpPr>
             <a:cxnSpLocks/>
             <a:stCxn id="12" idx="2"/>
-            <a:endCxn id="321" idx="2"/>
+            <a:endCxn id="8" idx="0"/>
           </p:cNvCxnSpPr>
           <p:nvPr/>
         </p:nvCxnSpPr>
         <p:spPr>
           <a:xfrm rot="16200000" flipH="1">
-            <a:off x="4642893" y="-1069694"/>
-            <a:ext cx="17287" cy="4074862"/>
+            <a:off x="1485019" y="330783"/>
+            <a:ext cx="500777" cy="1757398"/>
           </a:xfrm>
           <a:prstGeom prst="bentConnector3">
             <a:avLst>
-              <a:gd name="adj1" fmla="val 1422381"/>
+              <a:gd name="adj1" fmla="val 50000"/>
             </a:avLst>
           </a:prstGeom>
           <a:ln w="12700">
@@ -7204,10 +7608,10 @@
       </p:cxnSp>
       <p:sp>
         <p:nvSpPr>
-          <p:cNvPr id="357" name="모서리가 둥근 직사각형 356">
-            <a:extLst>
-              <a:ext uri="{FF2B5EF4-FFF2-40B4-BE49-F238E27FC236}">
-                <a16:creationId xmlns:a16="http://schemas.microsoft.com/office/drawing/2014/main" id="{98B9172A-F9FA-1B03-2E93-451F5EA733A8}"/>
+          <p:cNvPr id="24" name="모서리가 둥근 직사각형 23">
+            <a:extLst>
+              <a:ext uri="{FF2B5EF4-FFF2-40B4-BE49-F238E27FC236}">
+                <a16:creationId xmlns:a16="http://schemas.microsoft.com/office/drawing/2014/main" id="{8ED8361A-F84E-3543-BF4E-3CBEFDBBA5F4}"/>
               </a:ext>
             </a:extLst>
           </p:cNvPr>
@@ -7216,14 +7620,194 @@
         </p:nvSpPr>
         <p:spPr>
           <a:xfrm>
-            <a:off x="2608929" y="957216"/>
-            <a:ext cx="1164463" cy="185590"/>
+            <a:off x="2675764" y="339502"/>
+            <a:ext cx="1524858" cy="636879"/>
+          </a:xfrm>
+          <a:prstGeom prst="roundRect">
+            <a:avLst>
+              <a:gd name="adj" fmla="val 7121"/>
+            </a:avLst>
+          </a:prstGeom>
+          <a:solidFill>
+            <a:schemeClr val="bg1"/>
+          </a:solidFill>
+          <a:ln w="12700">
+            <a:prstDash val="dash"/>
+          </a:ln>
+        </p:spPr>
+        <p:style>
+          <a:lnRef idx="2">
+            <a:schemeClr val="accent1">
+              <a:shade val="15000"/>
+            </a:schemeClr>
+          </a:lnRef>
+          <a:fillRef idx="1">
+            <a:schemeClr val="accent1"/>
+          </a:fillRef>
+          <a:effectRef idx="0">
+            <a:schemeClr val="accent1"/>
+          </a:effectRef>
+          <a:fontRef idx="minor">
+            <a:schemeClr val="lt1"/>
+          </a:fontRef>
+        </p:style>
+        <p:txBody>
+          <a:bodyPr rtlCol="0" anchor="t"/>
+          <a:lstStyle/>
+          <a:p>
+            <a:pPr algn="ctr"/>
+            <a:r>
+              <a:rPr kumimoji="1" lang="en-US" altLang="ko-KR" sz="900" b="1">
+                <a:solidFill>
+                  <a:schemeClr val="tx1"/>
+                </a:solidFill>
+              </a:rPr>
+              <a:t>Secrets</a:t>
+            </a:r>
+            <a:endParaRPr kumimoji="1" lang="ko-KR" altLang="en-US" sz="900" b="1">
+              <a:solidFill>
+                <a:schemeClr val="tx1"/>
+              </a:solidFill>
+            </a:endParaRPr>
+          </a:p>
+        </p:txBody>
+      </p:sp>
+      <p:sp>
+        <p:nvSpPr>
+          <p:cNvPr id="25" name="모서리가 둥근 직사각형 24">
+            <a:extLst>
+              <a:ext uri="{FF2B5EF4-FFF2-40B4-BE49-F238E27FC236}">
+                <a16:creationId xmlns:a16="http://schemas.microsoft.com/office/drawing/2014/main" id="{82563B5F-217D-6A6C-E419-540B3208F3EF}"/>
+              </a:ext>
+            </a:extLst>
+          </p:cNvPr>
+          <p:cNvSpPr/>
+          <p:nvPr/>
+        </p:nvSpPr>
+        <p:spPr>
+          <a:xfrm>
+            <a:off x="2783599" y="612417"/>
+            <a:ext cx="1309186" cy="285430"/>
           </a:xfrm>
           <a:prstGeom prst="roundRect">
             <a:avLst>
               <a:gd name="adj" fmla="val 12191"/>
             </a:avLst>
           </a:prstGeom>
+          <a:solidFill>
+            <a:schemeClr val="bg1">
+              <a:lumMod val="95000"/>
+            </a:schemeClr>
+          </a:solidFill>
+          <a:ln w="12700"/>
+        </p:spPr>
+        <p:style>
+          <a:lnRef idx="2">
+            <a:schemeClr val="accent1">
+              <a:shade val="15000"/>
+            </a:schemeClr>
+          </a:lnRef>
+          <a:fillRef idx="1">
+            <a:schemeClr val="accent1"/>
+          </a:fillRef>
+          <a:effectRef idx="0">
+            <a:schemeClr val="accent1"/>
+          </a:effectRef>
+          <a:fontRef idx="minor">
+            <a:schemeClr val="lt1"/>
+          </a:fontRef>
+        </p:style>
+        <p:txBody>
+          <a:bodyPr rtlCol="0" anchor="ctr"/>
+          <a:lstStyle/>
+          <a:p>
+            <a:pPr algn="ctr"/>
+            <a:r>
+              <a:rPr kumimoji="1" lang="en-US" altLang="ko-KR" sz="800">
+                <a:solidFill>
+                  <a:schemeClr val="tx1"/>
+                </a:solidFill>
+              </a:rPr>
+              <a:t>internal-wasm</a:t>
+            </a:r>
+            <a:endParaRPr kumimoji="1" lang="ko-KR" altLang="en-US" sz="800">
+              <a:solidFill>
+                <a:schemeClr val="tx1"/>
+              </a:solidFill>
+            </a:endParaRPr>
+          </a:p>
+        </p:txBody>
+      </p:sp>
+      <p:cxnSp>
+        <p:nvCxnSpPr>
+          <p:cNvPr id="26" name="꺾인 연결선[E] 25">
+            <a:extLst>
+              <a:ext uri="{FF2B5EF4-FFF2-40B4-BE49-F238E27FC236}">
+                <a16:creationId xmlns:a16="http://schemas.microsoft.com/office/drawing/2014/main" id="{E1A57E89-790B-87C0-20EC-092DF4A48A54}"/>
+              </a:ext>
+            </a:extLst>
+          </p:cNvPr>
+          <p:cNvCxnSpPr>
+            <a:cxnSpLocks/>
+            <a:stCxn id="12" idx="2"/>
+            <a:endCxn id="24" idx="2"/>
+          </p:cNvCxnSpPr>
+          <p:nvPr/>
+        </p:nvCxnSpPr>
+        <p:spPr>
+          <a:xfrm rot="16200000" flipH="1">
+            <a:off x="2138807" y="-323006"/>
+            <a:ext cx="17287" cy="2581485"/>
+          </a:xfrm>
+          <a:prstGeom prst="bentConnector3">
+            <a:avLst>
+              <a:gd name="adj1" fmla="val 1422381"/>
+            </a:avLst>
+          </a:prstGeom>
+          <a:ln w="12700">
+            <a:solidFill>
+              <a:schemeClr val="tx1"/>
+            </a:solidFill>
+            <a:tailEnd type="triangle"/>
+          </a:ln>
+        </p:spPr>
+        <p:style>
+          <a:lnRef idx="1">
+            <a:schemeClr val="accent1"/>
+          </a:lnRef>
+          <a:fillRef idx="0">
+            <a:schemeClr val="accent1"/>
+          </a:fillRef>
+          <a:effectRef idx="0">
+            <a:schemeClr val="accent1"/>
+          </a:effectRef>
+          <a:fontRef idx="minor">
+            <a:schemeClr val="tx1"/>
+          </a:fontRef>
+        </p:style>
+      </p:cxnSp>
+      <p:sp>
+        <p:nvSpPr>
+          <p:cNvPr id="29" name="모서리가 둥근 직사각형 28">
+            <a:extLst>
+              <a:ext uri="{FF2B5EF4-FFF2-40B4-BE49-F238E27FC236}">
+                <a16:creationId xmlns:a16="http://schemas.microsoft.com/office/drawing/2014/main" id="{BB4C1FE8-6853-C6C1-7048-471EBA58D86D}"/>
+              </a:ext>
+            </a:extLst>
+          </p:cNvPr>
+          <p:cNvSpPr/>
+          <p:nvPr/>
+        </p:nvSpPr>
+        <p:spPr>
+          <a:xfrm>
+            <a:off x="3438193" y="980188"/>
+            <a:ext cx="1164463" cy="185590"/>
+          </a:xfrm>
+          <a:prstGeom prst="roundRect">
+            <a:avLst>
+              <a:gd name="adj" fmla="val 12191"/>
+            </a:avLst>
+          </a:prstGeom>
           <a:noFill/>
           <a:ln w="12700">
             <a:noFill/>
@@ -7250,335 +7834,12 @@
           <a:lstStyle/>
           <a:p>
             <a:r>
-              <a:rPr kumimoji="1" lang="en-US" altLang="ko-KR" sz="800" i="1">
-                <a:solidFill>
-                  <a:schemeClr val="tx1"/>
-                </a:solidFill>
-              </a:rPr>
-              <a:t>1 Stream with </a:t>
-            </a:r>
-            <a:r>
               <a:rPr kumimoji="1" lang="en-US" altLang="ko-KR" sz="800" b="1" i="1" u="sng">
                 <a:solidFill>
                   <a:schemeClr val="tx1"/>
                 </a:solidFill>
               </a:rPr>
-              <a:t>ADS </a:t>
-            </a:r>
-            <a:endParaRPr kumimoji="1" lang="ko-KR" altLang="en-US" sz="800" b="1" i="1" u="sng">
-              <a:solidFill>
-                <a:schemeClr val="tx1"/>
-              </a:solidFill>
-            </a:endParaRPr>
-          </a:p>
-        </p:txBody>
-      </p:sp>
-      <p:sp>
-        <p:nvSpPr>
-          <p:cNvPr id="358" name="모서리가 둥근 직사각형 357">
-            <a:extLst>
-              <a:ext uri="{FF2B5EF4-FFF2-40B4-BE49-F238E27FC236}">
-                <a16:creationId xmlns:a16="http://schemas.microsoft.com/office/drawing/2014/main" id="{EB9408EA-B995-1C5C-656D-49D8F8A4C605}"/>
-              </a:ext>
-            </a:extLst>
-          </p:cNvPr>
-          <p:cNvSpPr/>
-          <p:nvPr/>
-        </p:nvSpPr>
-        <p:spPr>
-          <a:xfrm>
-            <a:off x="2608929" y="1272082"/>
-            <a:ext cx="1164463" cy="185590"/>
-          </a:xfrm>
-          <a:prstGeom prst="roundRect">
-            <a:avLst>
-              <a:gd name="adj" fmla="val 12191"/>
-            </a:avLst>
-          </a:prstGeom>
-          <a:noFill/>
-          <a:ln w="12700">
-            <a:noFill/>
-          </a:ln>
-        </p:spPr>
-        <p:style>
-          <a:lnRef idx="2">
-            <a:schemeClr val="accent1">
-              <a:shade val="15000"/>
-            </a:schemeClr>
-          </a:lnRef>
-          <a:fillRef idx="1">
-            <a:schemeClr val="accent1"/>
-          </a:fillRef>
-          <a:effectRef idx="0">
-            <a:schemeClr val="accent1"/>
-          </a:effectRef>
-          <a:fontRef idx="minor">
-            <a:schemeClr val="lt1"/>
-          </a:fontRef>
-        </p:style>
-        <p:txBody>
-          <a:bodyPr rtlCol="0" anchor="ctr"/>
-          <a:lstStyle/>
-          <a:p>
-            <a:r>
-              <a:rPr kumimoji="1" lang="en-US" altLang="ko-KR" sz="800" b="1" i="1" u="sng">
-                <a:solidFill>
-                  <a:schemeClr val="tx1"/>
-                </a:solidFill>
-              </a:rPr>
-              <a:t>LDS</a:t>
-            </a:r>
-            <a:endParaRPr kumimoji="1" lang="ko-KR" altLang="en-US" sz="800" b="1" i="1" u="sng">
-              <a:solidFill>
-                <a:schemeClr val="tx1"/>
-              </a:solidFill>
-            </a:endParaRPr>
-          </a:p>
-        </p:txBody>
-      </p:sp>
-      <p:sp>
-        <p:nvSpPr>
-          <p:cNvPr id="359" name="모서리가 둥근 직사각형 358">
-            <a:extLst>
-              <a:ext uri="{FF2B5EF4-FFF2-40B4-BE49-F238E27FC236}">
-                <a16:creationId xmlns:a16="http://schemas.microsoft.com/office/drawing/2014/main" id="{FF0423B0-19B3-5AA0-BE1E-DF5FFBDC5025}"/>
-              </a:ext>
-            </a:extLst>
-          </p:cNvPr>
-          <p:cNvSpPr/>
-          <p:nvPr/>
-        </p:nvSpPr>
-        <p:spPr>
-          <a:xfrm>
-            <a:off x="4537559" y="1272082"/>
-            <a:ext cx="1164463" cy="185590"/>
-          </a:xfrm>
-          <a:prstGeom prst="roundRect">
-            <a:avLst>
-              <a:gd name="adj" fmla="val 12191"/>
-            </a:avLst>
-          </a:prstGeom>
-          <a:noFill/>
-          <a:ln w="12700">
-            <a:noFill/>
-          </a:ln>
-        </p:spPr>
-        <p:style>
-          <a:lnRef idx="2">
-            <a:schemeClr val="accent1">
-              <a:shade val="15000"/>
-            </a:schemeClr>
-          </a:lnRef>
-          <a:fillRef idx="1">
-            <a:schemeClr val="accent1"/>
-          </a:fillRef>
-          <a:effectRef idx="0">
-            <a:schemeClr val="accent1"/>
-          </a:effectRef>
-          <a:fontRef idx="minor">
-            <a:schemeClr val="lt1"/>
-          </a:fontRef>
-        </p:style>
-        <p:txBody>
-          <a:bodyPr rtlCol="0" anchor="ctr"/>
-          <a:lstStyle/>
-          <a:p>
-            <a:r>
-              <a:rPr kumimoji="1" lang="en-US" altLang="ko-KR" sz="800" b="1" i="1" u="sng">
-                <a:solidFill>
-                  <a:schemeClr val="tx1"/>
-                </a:solidFill>
-              </a:rPr>
-              <a:t>RDS</a:t>
-            </a:r>
-            <a:endParaRPr kumimoji="1" lang="ko-KR" altLang="en-US" sz="800" b="1" i="1" u="sng">
-              <a:solidFill>
-                <a:schemeClr val="tx1"/>
-              </a:solidFill>
-            </a:endParaRPr>
-          </a:p>
-        </p:txBody>
-      </p:sp>
-      <p:sp>
-        <p:nvSpPr>
-          <p:cNvPr id="360" name="모서리가 둥근 직사각형 359">
-            <a:extLst>
-              <a:ext uri="{FF2B5EF4-FFF2-40B4-BE49-F238E27FC236}">
-                <a16:creationId xmlns:a16="http://schemas.microsoft.com/office/drawing/2014/main" id="{661D18C1-B650-C449-EADD-11E008B59FCC}"/>
-              </a:ext>
-            </a:extLst>
-          </p:cNvPr>
-          <p:cNvSpPr/>
-          <p:nvPr/>
-        </p:nvSpPr>
-        <p:spPr>
-          <a:xfrm>
-            <a:off x="6467874" y="1272082"/>
-            <a:ext cx="1164463" cy="185590"/>
-          </a:xfrm>
-          <a:prstGeom prst="roundRect">
-            <a:avLst>
-              <a:gd name="adj" fmla="val 12191"/>
-            </a:avLst>
-          </a:prstGeom>
-          <a:noFill/>
-          <a:ln w="12700">
-            <a:noFill/>
-          </a:ln>
-        </p:spPr>
-        <p:style>
-          <a:lnRef idx="2">
-            <a:schemeClr val="accent1">
-              <a:shade val="15000"/>
-            </a:schemeClr>
-          </a:lnRef>
-          <a:fillRef idx="1">
-            <a:schemeClr val="accent1"/>
-          </a:fillRef>
-          <a:effectRef idx="0">
-            <a:schemeClr val="accent1"/>
-          </a:effectRef>
-          <a:fontRef idx="minor">
-            <a:schemeClr val="lt1"/>
-          </a:fontRef>
-        </p:style>
-        <p:txBody>
-          <a:bodyPr rtlCol="0" anchor="ctr"/>
-          <a:lstStyle/>
-          <a:p>
-            <a:r>
-              <a:rPr kumimoji="1" lang="en-US" altLang="ko-KR" sz="800" b="1" i="1" u="sng">
-                <a:solidFill>
-                  <a:schemeClr val="tx1"/>
-                </a:solidFill>
-              </a:rPr>
-              <a:t>CDS</a:t>
-            </a:r>
-            <a:endParaRPr kumimoji="1" lang="ko-KR" altLang="en-US" sz="800" b="1" i="1" u="sng">
-              <a:solidFill>
-                <a:schemeClr val="tx1"/>
-              </a:solidFill>
-            </a:endParaRPr>
-          </a:p>
-        </p:txBody>
-      </p:sp>
-      <p:sp>
-        <p:nvSpPr>
-          <p:cNvPr id="361" name="모서리가 둥근 직사각형 360">
-            <a:extLst>
-              <a:ext uri="{FF2B5EF4-FFF2-40B4-BE49-F238E27FC236}">
-                <a16:creationId xmlns:a16="http://schemas.microsoft.com/office/drawing/2014/main" id="{0F07CD2D-FCD0-D83D-E3C3-A41C2C0EE441}"/>
-              </a:ext>
-            </a:extLst>
-          </p:cNvPr>
-          <p:cNvSpPr/>
-          <p:nvPr/>
-        </p:nvSpPr>
-        <p:spPr>
-          <a:xfrm>
-            <a:off x="8217834" y="1272082"/>
-            <a:ext cx="1164463" cy="185590"/>
-          </a:xfrm>
-          <a:prstGeom prst="roundRect">
-            <a:avLst>
-              <a:gd name="adj" fmla="val 12191"/>
-            </a:avLst>
-          </a:prstGeom>
-          <a:noFill/>
-          <a:ln w="12700">
-            <a:noFill/>
-          </a:ln>
-        </p:spPr>
-        <p:style>
-          <a:lnRef idx="2">
-            <a:schemeClr val="accent1">
-              <a:shade val="15000"/>
-            </a:schemeClr>
-          </a:lnRef>
-          <a:fillRef idx="1">
-            <a:schemeClr val="accent1"/>
-          </a:fillRef>
-          <a:effectRef idx="0">
-            <a:schemeClr val="accent1"/>
-          </a:effectRef>
-          <a:fontRef idx="minor">
-            <a:schemeClr val="lt1"/>
-          </a:fontRef>
-        </p:style>
-        <p:txBody>
-          <a:bodyPr rtlCol="0" anchor="ctr"/>
-          <a:lstStyle/>
-          <a:p>
-            <a:r>
-              <a:rPr kumimoji="1" lang="en-US" altLang="ko-KR" sz="800" b="1" i="1" u="sng">
-                <a:solidFill>
-                  <a:schemeClr val="tx1"/>
-                </a:solidFill>
-              </a:rPr>
-              <a:t>EDS</a:t>
-            </a:r>
-            <a:endParaRPr kumimoji="1" lang="ko-KR" altLang="en-US" sz="800" b="1" i="1" u="sng">
-              <a:solidFill>
-                <a:schemeClr val="tx1"/>
-              </a:solidFill>
-            </a:endParaRPr>
-          </a:p>
-        </p:txBody>
-      </p:sp>
-      <p:sp>
-        <p:nvSpPr>
-          <p:cNvPr id="362" name="모서리가 둥근 직사각형 361">
-            <a:extLst>
-              <a:ext uri="{FF2B5EF4-FFF2-40B4-BE49-F238E27FC236}">
-                <a16:creationId xmlns:a16="http://schemas.microsoft.com/office/drawing/2014/main" id="{CACB67CA-B4C4-6894-0E4A-93581DB4AFCF}"/>
-              </a:ext>
-            </a:extLst>
-          </p:cNvPr>
-          <p:cNvSpPr/>
-          <p:nvPr/>
-        </p:nvSpPr>
-        <p:spPr>
-          <a:xfrm>
-            <a:off x="6683791" y="980188"/>
-            <a:ext cx="1164463" cy="185590"/>
-          </a:xfrm>
-          <a:prstGeom prst="roundRect">
-            <a:avLst>
-              <a:gd name="adj" fmla="val 12191"/>
-            </a:avLst>
-          </a:prstGeom>
-          <a:noFill/>
-          <a:ln w="12700">
-            <a:noFill/>
-          </a:ln>
-        </p:spPr>
-        <p:style>
-          <a:lnRef idx="2">
-            <a:schemeClr val="accent1">
-              <a:shade val="15000"/>
-            </a:schemeClr>
-          </a:lnRef>
-          <a:fillRef idx="1">
-            <a:schemeClr val="accent1"/>
-          </a:fillRef>
-          <a:effectRef idx="0">
-            <a:schemeClr val="accent1"/>
-          </a:effectRef>
-          <a:fontRef idx="minor">
-            <a:schemeClr val="lt1"/>
-          </a:fontRef>
-        </p:style>
-        <p:txBody>
-          <a:bodyPr rtlCol="0" anchor="ctr"/>
-          <a:lstStyle/>
-          <a:p>
-            <a:r>
-              <a:rPr kumimoji="1" lang="en-US" altLang="ko-KR" sz="800" b="1" i="1" u="sng">
-                <a:solidFill>
-                  <a:schemeClr val="tx1"/>
-                </a:solidFill>
-              </a:rPr>
-              <a:t>SDS</a:t>
+              <a:t>ECDS</a:t>
             </a:r>
             <a:endParaRPr kumimoji="1" lang="ko-KR" altLang="en-US" sz="800" b="1" i="1" u="sng">
               <a:solidFill>
@@ -7638,6 +7899,4235 @@
 </file>
 
 <file path=ppt/slides/slide3.xml><?xml version="1.0" encoding="utf-8"?>
+<p:sld xmlns:a="http://schemas.openxmlformats.org/drawingml/2006/main" xmlns:r="http://schemas.openxmlformats.org/officeDocument/2006/relationships" xmlns:p="http://schemas.openxmlformats.org/presentationml/2006/main">
+  <p:cSld>
+    <p:spTree>
+      <p:nvGrpSpPr>
+        <p:cNvPr id="1" name="">
+          <a:extLst>
+            <a:ext uri="{FF2B5EF4-FFF2-40B4-BE49-F238E27FC236}">
+              <a16:creationId xmlns:a16="http://schemas.microsoft.com/office/drawing/2014/main" id="{C09A90FB-83E7-497C-AB41-C771CCCB1AEF}"/>
+            </a:ext>
+          </a:extLst>
+        </p:cNvPr>
+        <p:cNvGrpSpPr/>
+        <p:nvPr/>
+      </p:nvGrpSpPr>
+      <p:grpSpPr>
+        <a:xfrm>
+          <a:off x="0" y="0"/>
+          <a:ext cx="0" cy="0"/>
+          <a:chOff x="0" y="0"/>
+          <a:chExt cx="0" cy="0"/>
+        </a:xfrm>
+      </p:grpSpPr>
+      <p:sp>
+        <p:nvSpPr>
+          <p:cNvPr id="12" name="모서리가 둥근 직사각형 11">
+            <a:extLst>
+              <a:ext uri="{FF2B5EF4-FFF2-40B4-BE49-F238E27FC236}">
+                <a16:creationId xmlns:a16="http://schemas.microsoft.com/office/drawing/2014/main" id="{99F531AD-B53D-8B32-CE3A-006A4F516F49}"/>
+              </a:ext>
+            </a:extLst>
+          </p:cNvPr>
+          <p:cNvSpPr/>
+          <p:nvPr/>
+        </p:nvSpPr>
+        <p:spPr>
+          <a:xfrm>
+            <a:off x="1959512" y="531455"/>
+            <a:ext cx="1309186" cy="427639"/>
+          </a:xfrm>
+          <a:prstGeom prst="roundRect">
+            <a:avLst>
+              <a:gd name="adj" fmla="val 12191"/>
+            </a:avLst>
+          </a:prstGeom>
+          <a:solidFill>
+            <a:schemeClr val="bg1">
+              <a:lumMod val="95000"/>
+            </a:schemeClr>
+          </a:solidFill>
+          <a:ln w="12700"/>
+        </p:spPr>
+        <p:style>
+          <a:lnRef idx="2">
+            <a:schemeClr val="accent1">
+              <a:shade val="15000"/>
+            </a:schemeClr>
+          </a:lnRef>
+          <a:fillRef idx="1">
+            <a:schemeClr val="accent1"/>
+          </a:fillRef>
+          <a:effectRef idx="0">
+            <a:schemeClr val="accent1"/>
+          </a:effectRef>
+          <a:fontRef idx="minor">
+            <a:schemeClr val="lt1"/>
+          </a:fontRef>
+        </p:style>
+        <p:txBody>
+          <a:bodyPr rtlCol="0" anchor="ctr"/>
+          <a:lstStyle/>
+          <a:p>
+            <a:pPr algn="ctr"/>
+            <a:r>
+              <a:rPr kumimoji="1" lang="en-US" altLang="ko-KR" sz="800">
+                <a:solidFill>
+                  <a:schemeClr val="tx1"/>
+                </a:solidFill>
+              </a:rPr>
+              <a:t>xDS Server</a:t>
+            </a:r>
+          </a:p>
+          <a:p>
+            <a:pPr algn="ctr"/>
+            <a:r>
+              <a:rPr kumimoji="1" lang="en-US" altLang="ko-KR" sz="800">
+                <a:solidFill>
+                  <a:schemeClr val="tx1"/>
+                </a:solidFill>
+              </a:rPr>
+              <a:t>(Control Plane)</a:t>
+            </a:r>
+            <a:endParaRPr kumimoji="1" lang="ko-KR" altLang="en-US" sz="800">
+              <a:solidFill>
+                <a:schemeClr val="tx1"/>
+              </a:solidFill>
+            </a:endParaRPr>
+          </a:p>
+        </p:txBody>
+      </p:sp>
+      <p:sp>
+        <p:nvSpPr>
+          <p:cNvPr id="3" name="모서리가 둥근 직사각형 2">
+            <a:extLst>
+              <a:ext uri="{FF2B5EF4-FFF2-40B4-BE49-F238E27FC236}">
+                <a16:creationId xmlns:a16="http://schemas.microsoft.com/office/drawing/2014/main" id="{856D3B0B-846E-F84E-3C62-349C630B0B6D}"/>
+              </a:ext>
+            </a:extLst>
+          </p:cNvPr>
+          <p:cNvSpPr/>
+          <p:nvPr/>
+        </p:nvSpPr>
+        <p:spPr>
+          <a:xfrm>
+            <a:off x="132487" y="1459871"/>
+            <a:ext cx="1457470" cy="3446653"/>
+          </a:xfrm>
+          <a:prstGeom prst="roundRect">
+            <a:avLst>
+              <a:gd name="adj" fmla="val 4130"/>
+            </a:avLst>
+          </a:prstGeom>
+          <a:solidFill>
+            <a:schemeClr val="bg1"/>
+          </a:solidFill>
+          <a:ln w="12700">
+            <a:prstDash val="dash"/>
+          </a:ln>
+        </p:spPr>
+        <p:style>
+          <a:lnRef idx="2">
+            <a:schemeClr val="accent1">
+              <a:shade val="15000"/>
+            </a:schemeClr>
+          </a:lnRef>
+          <a:fillRef idx="1">
+            <a:schemeClr val="accent1"/>
+          </a:fillRef>
+          <a:effectRef idx="0">
+            <a:schemeClr val="accent1"/>
+          </a:effectRef>
+          <a:fontRef idx="minor">
+            <a:schemeClr val="lt1"/>
+          </a:fontRef>
+        </p:style>
+        <p:txBody>
+          <a:bodyPr rtlCol="0" anchor="t"/>
+          <a:lstStyle/>
+          <a:p>
+            <a:pPr algn="ctr"/>
+            <a:r>
+              <a:rPr kumimoji="1" lang="en-US" altLang="ko-KR" sz="900" b="1">
+                <a:solidFill>
+                  <a:schemeClr val="tx1"/>
+                </a:solidFill>
+              </a:rPr>
+              <a:t>Clients</a:t>
+            </a:r>
+          </a:p>
+        </p:txBody>
+      </p:sp>
+      <p:sp>
+        <p:nvSpPr>
+          <p:cNvPr id="10" name="모서리가 둥근 직사각형 9">
+            <a:extLst>
+              <a:ext uri="{FF2B5EF4-FFF2-40B4-BE49-F238E27FC236}">
+                <a16:creationId xmlns:a16="http://schemas.microsoft.com/office/drawing/2014/main" id="{76AEB06D-5A5A-6CDB-58C1-5825199CC562}"/>
+              </a:ext>
+            </a:extLst>
+          </p:cNvPr>
+          <p:cNvSpPr/>
+          <p:nvPr/>
+        </p:nvSpPr>
+        <p:spPr>
+          <a:xfrm>
+            <a:off x="202115" y="1736995"/>
+            <a:ext cx="1318214" cy="427639"/>
+          </a:xfrm>
+          <a:prstGeom prst="roundRect">
+            <a:avLst>
+              <a:gd name="adj" fmla="val 12191"/>
+            </a:avLst>
+          </a:prstGeom>
+          <a:solidFill>
+            <a:schemeClr val="bg1">
+              <a:lumMod val="95000"/>
+            </a:schemeClr>
+          </a:solidFill>
+          <a:ln w="12700"/>
+        </p:spPr>
+        <p:style>
+          <a:lnRef idx="2">
+            <a:schemeClr val="accent1">
+              <a:shade val="15000"/>
+            </a:schemeClr>
+          </a:lnRef>
+          <a:fillRef idx="1">
+            <a:schemeClr val="accent1"/>
+          </a:fillRef>
+          <a:effectRef idx="0">
+            <a:schemeClr val="accent1"/>
+          </a:effectRef>
+          <a:fontRef idx="minor">
+            <a:schemeClr val="lt1"/>
+          </a:fontRef>
+        </p:style>
+        <p:txBody>
+          <a:bodyPr rtlCol="0" anchor="ctr"/>
+          <a:lstStyle/>
+          <a:p>
+            <a:r>
+              <a:rPr kumimoji="1" lang="en-US" altLang="ko-KR" sz="800">
+                <a:solidFill>
+                  <a:schemeClr val="tx1"/>
+                </a:solidFill>
+              </a:rPr>
+              <a:t>Server Port: 8080</a:t>
+            </a:r>
+          </a:p>
+          <a:p>
+            <a:r>
+              <a:rPr kumimoji="1" lang="en-US" altLang="ko-KR" sz="800">
+                <a:solidFill>
+                  <a:schemeClr val="tx1"/>
+                </a:solidFill>
+              </a:rPr>
+              <a:t>Host: reviews</a:t>
+            </a:r>
+          </a:p>
+          <a:p>
+            <a:r>
+              <a:rPr kumimoji="1" lang="en-US" altLang="ko-KR" sz="800">
+                <a:solidFill>
+                  <a:schemeClr val="tx1"/>
+                </a:solidFill>
+              </a:rPr>
+              <a:t>Path: /api</a:t>
+            </a:r>
+            <a:endParaRPr kumimoji="1" lang="ko-KR" altLang="en-US" sz="800">
+              <a:solidFill>
+                <a:schemeClr val="tx1"/>
+              </a:solidFill>
+            </a:endParaRPr>
+          </a:p>
+        </p:txBody>
+      </p:sp>
+      <p:sp>
+        <p:nvSpPr>
+          <p:cNvPr id="8" name="모서리가 둥근 직사각형 7">
+            <a:extLst>
+              <a:ext uri="{FF2B5EF4-FFF2-40B4-BE49-F238E27FC236}">
+                <a16:creationId xmlns:a16="http://schemas.microsoft.com/office/drawing/2014/main" id="{6D67E36F-3E46-4FA9-7395-59C590228003}"/>
+              </a:ext>
+            </a:extLst>
+          </p:cNvPr>
+          <p:cNvSpPr/>
+          <p:nvPr/>
+        </p:nvSpPr>
+        <p:spPr>
+          <a:xfrm>
+            <a:off x="1885371" y="1459871"/>
+            <a:ext cx="1457470" cy="3446653"/>
+          </a:xfrm>
+          <a:prstGeom prst="roundRect">
+            <a:avLst>
+              <a:gd name="adj" fmla="val 4130"/>
+            </a:avLst>
+          </a:prstGeom>
+          <a:solidFill>
+            <a:schemeClr val="bg1"/>
+          </a:solidFill>
+          <a:ln w="12700">
+            <a:prstDash val="dash"/>
+          </a:ln>
+        </p:spPr>
+        <p:style>
+          <a:lnRef idx="2">
+            <a:schemeClr val="accent1">
+              <a:shade val="15000"/>
+            </a:schemeClr>
+          </a:lnRef>
+          <a:fillRef idx="1">
+            <a:schemeClr val="accent1"/>
+          </a:fillRef>
+          <a:effectRef idx="0">
+            <a:schemeClr val="accent1"/>
+          </a:effectRef>
+          <a:fontRef idx="minor">
+            <a:schemeClr val="lt1"/>
+          </a:fontRef>
+        </p:style>
+        <p:txBody>
+          <a:bodyPr rtlCol="0" anchor="t"/>
+          <a:lstStyle/>
+          <a:p>
+            <a:pPr algn="ctr"/>
+            <a:r>
+              <a:rPr kumimoji="1" lang="en-US" altLang="ko-KR" sz="900" b="1">
+                <a:solidFill>
+                  <a:schemeClr val="tx1"/>
+                </a:solidFill>
+              </a:rPr>
+              <a:t>Listeners</a:t>
+            </a:r>
+            <a:endParaRPr kumimoji="1" lang="ko-KR" altLang="en-US" sz="900" b="1">
+              <a:solidFill>
+                <a:schemeClr val="tx1"/>
+              </a:solidFill>
+            </a:endParaRPr>
+          </a:p>
+        </p:txBody>
+      </p:sp>
+      <p:sp>
+        <p:nvSpPr>
+          <p:cNvPr id="5" name="모서리가 둥근 직사각형 4">
+            <a:extLst>
+              <a:ext uri="{FF2B5EF4-FFF2-40B4-BE49-F238E27FC236}">
+                <a16:creationId xmlns:a16="http://schemas.microsoft.com/office/drawing/2014/main" id="{299E245A-657E-D228-E003-FC1E0FC83B6C}"/>
+              </a:ext>
+            </a:extLst>
+          </p:cNvPr>
+          <p:cNvSpPr/>
+          <p:nvPr/>
+        </p:nvSpPr>
+        <p:spPr>
+          <a:xfrm>
+            <a:off x="1959512" y="1736994"/>
+            <a:ext cx="1309186" cy="860591"/>
+          </a:xfrm>
+          <a:prstGeom prst="roundRect">
+            <a:avLst>
+              <a:gd name="adj" fmla="val 7913"/>
+            </a:avLst>
+          </a:prstGeom>
+          <a:solidFill>
+            <a:schemeClr val="bg1">
+              <a:lumMod val="95000"/>
+            </a:schemeClr>
+          </a:solidFill>
+          <a:ln w="12700"/>
+        </p:spPr>
+        <p:style>
+          <a:lnRef idx="2">
+            <a:schemeClr val="accent1">
+              <a:shade val="15000"/>
+            </a:schemeClr>
+          </a:lnRef>
+          <a:fillRef idx="1">
+            <a:schemeClr val="accent1"/>
+          </a:fillRef>
+          <a:effectRef idx="0">
+            <a:schemeClr val="accent1"/>
+          </a:effectRef>
+          <a:fontRef idx="minor">
+            <a:schemeClr val="lt1"/>
+          </a:fontRef>
+        </p:style>
+        <p:txBody>
+          <a:bodyPr rtlCol="0" anchor="ctr"/>
+          <a:lstStyle/>
+          <a:p>
+            <a:pPr algn="ctr"/>
+            <a:r>
+              <a:rPr kumimoji="1" lang="en-US" altLang="ko-KR" sz="800">
+                <a:solidFill>
+                  <a:schemeClr val="tx1"/>
+                </a:solidFill>
+              </a:rPr>
+              <a:t>internal-listener</a:t>
+            </a:r>
+          </a:p>
+          <a:p>
+            <a:pPr algn="ctr"/>
+            <a:endParaRPr kumimoji="1" lang="en-US" altLang="ko-KR" sz="800">
+              <a:solidFill>
+                <a:schemeClr val="tx1"/>
+              </a:solidFill>
+            </a:endParaRPr>
+          </a:p>
+          <a:p>
+            <a:r>
+              <a:rPr kumimoji="1" lang="en-US" altLang="ko-KR" sz="800">
+                <a:solidFill>
+                  <a:schemeClr val="tx1"/>
+                </a:solidFill>
+              </a:rPr>
+              <a:t>mTLS</a:t>
+            </a:r>
+          </a:p>
+          <a:p>
+            <a:r>
+              <a:rPr kumimoji="1" lang="en-US" altLang="ko-KR" sz="800">
+                <a:solidFill>
+                  <a:schemeClr val="tx1"/>
+                </a:solidFill>
+              </a:rPr>
+              <a:t>Listening Port: 8080</a:t>
+            </a:r>
+          </a:p>
+          <a:p>
+            <a:r>
+              <a:rPr kumimoji="1" lang="en-US" altLang="ko-KR" sz="800">
+                <a:solidFill>
+                  <a:schemeClr val="tx1"/>
+                </a:solidFill>
+              </a:rPr>
+              <a:t>RDS: internal-routes</a:t>
+            </a:r>
+          </a:p>
+          <a:p>
+            <a:r>
+              <a:rPr kumimoji="1" lang="en-US" altLang="ko-KR" sz="800">
+                <a:solidFill>
+                  <a:schemeClr val="tx1"/>
+                </a:solidFill>
+              </a:rPr>
+              <a:t>SDS: internal-cert</a:t>
+            </a:r>
+          </a:p>
+        </p:txBody>
+      </p:sp>
+      <p:sp>
+        <p:nvSpPr>
+          <p:cNvPr id="13" name="모서리가 둥근 직사각형 12">
+            <a:extLst>
+              <a:ext uri="{FF2B5EF4-FFF2-40B4-BE49-F238E27FC236}">
+                <a16:creationId xmlns:a16="http://schemas.microsoft.com/office/drawing/2014/main" id="{95C2615A-DAE3-7AC9-B183-1585AEBF1F9B}"/>
+              </a:ext>
+            </a:extLst>
+          </p:cNvPr>
+          <p:cNvSpPr/>
+          <p:nvPr/>
+        </p:nvSpPr>
+        <p:spPr>
+          <a:xfrm>
+            <a:off x="5741727" y="1459871"/>
+            <a:ext cx="1457470" cy="3446653"/>
+          </a:xfrm>
+          <a:prstGeom prst="roundRect">
+            <a:avLst>
+              <a:gd name="adj" fmla="val 4130"/>
+            </a:avLst>
+          </a:prstGeom>
+          <a:solidFill>
+            <a:schemeClr val="bg1"/>
+          </a:solidFill>
+          <a:ln w="12700">
+            <a:prstDash val="dash"/>
+          </a:ln>
+        </p:spPr>
+        <p:style>
+          <a:lnRef idx="2">
+            <a:schemeClr val="accent1">
+              <a:shade val="15000"/>
+            </a:schemeClr>
+          </a:lnRef>
+          <a:fillRef idx="1">
+            <a:schemeClr val="accent1"/>
+          </a:fillRef>
+          <a:effectRef idx="0">
+            <a:schemeClr val="accent1"/>
+          </a:effectRef>
+          <a:fontRef idx="minor">
+            <a:schemeClr val="lt1"/>
+          </a:fontRef>
+        </p:style>
+        <p:txBody>
+          <a:bodyPr rtlCol="0" anchor="t"/>
+          <a:lstStyle/>
+          <a:p>
+            <a:pPr algn="ctr"/>
+            <a:r>
+              <a:rPr kumimoji="1" lang="en-US" altLang="ko-KR" sz="900" b="1">
+                <a:solidFill>
+                  <a:schemeClr val="tx1"/>
+                </a:solidFill>
+              </a:rPr>
+              <a:t>Clusters</a:t>
+            </a:r>
+            <a:endParaRPr kumimoji="1" lang="ko-KR" altLang="en-US" sz="900" b="1">
+              <a:solidFill>
+                <a:schemeClr val="tx1"/>
+              </a:solidFill>
+            </a:endParaRPr>
+          </a:p>
+        </p:txBody>
+      </p:sp>
+      <p:sp>
+        <p:nvSpPr>
+          <p:cNvPr id="14" name="모서리가 둥근 직사각형 13">
+            <a:extLst>
+              <a:ext uri="{FF2B5EF4-FFF2-40B4-BE49-F238E27FC236}">
+                <a16:creationId xmlns:a16="http://schemas.microsoft.com/office/drawing/2014/main" id="{AFC7C989-D7B6-50B4-0700-E60FD040ADDA}"/>
+              </a:ext>
+            </a:extLst>
+          </p:cNvPr>
+          <p:cNvSpPr/>
+          <p:nvPr/>
+        </p:nvSpPr>
+        <p:spPr>
+          <a:xfrm>
+            <a:off x="5815870" y="1736995"/>
+            <a:ext cx="1309186" cy="427639"/>
+          </a:xfrm>
+          <a:prstGeom prst="roundRect">
+            <a:avLst>
+              <a:gd name="adj" fmla="val 12191"/>
+            </a:avLst>
+          </a:prstGeom>
+          <a:solidFill>
+            <a:schemeClr val="bg1">
+              <a:lumMod val="95000"/>
+            </a:schemeClr>
+          </a:solidFill>
+          <a:ln w="12700"/>
+        </p:spPr>
+        <p:style>
+          <a:lnRef idx="2">
+            <a:schemeClr val="accent1">
+              <a:shade val="15000"/>
+            </a:schemeClr>
+          </a:lnRef>
+          <a:fillRef idx="1">
+            <a:schemeClr val="accent1"/>
+          </a:fillRef>
+          <a:effectRef idx="0">
+            <a:schemeClr val="accent1"/>
+          </a:effectRef>
+          <a:fontRef idx="minor">
+            <a:schemeClr val="lt1"/>
+          </a:fontRef>
+        </p:style>
+        <p:txBody>
+          <a:bodyPr rtlCol="0" anchor="ctr"/>
+          <a:lstStyle/>
+          <a:p>
+            <a:pPr algn="ctr"/>
+            <a:r>
+              <a:rPr kumimoji="1" lang="en-US" altLang="ko-KR" sz="800">
+                <a:solidFill>
+                  <a:schemeClr val="tx1"/>
+                </a:solidFill>
+              </a:rPr>
+              <a:t>reviews-v1</a:t>
+            </a:r>
+          </a:p>
+          <a:p>
+            <a:pPr algn="ctr"/>
+            <a:endParaRPr kumimoji="1" lang="en-US" altLang="ko-KR" sz="800">
+              <a:solidFill>
+                <a:schemeClr val="tx1"/>
+              </a:solidFill>
+            </a:endParaRPr>
+          </a:p>
+          <a:p>
+            <a:r>
+              <a:rPr kumimoji="1" lang="en-US" altLang="ko-KR" sz="800">
+                <a:solidFill>
+                  <a:schemeClr val="tx1"/>
+                </a:solidFill>
+              </a:rPr>
+              <a:t>SDS: internal-cert</a:t>
+            </a:r>
+            <a:endParaRPr kumimoji="1" lang="ko-KR" altLang="en-US" sz="800">
+              <a:solidFill>
+                <a:schemeClr val="tx1"/>
+              </a:solidFill>
+            </a:endParaRPr>
+          </a:p>
+        </p:txBody>
+      </p:sp>
+      <p:sp>
+        <p:nvSpPr>
+          <p:cNvPr id="15" name="모서리가 둥근 직사각형 14">
+            <a:extLst>
+              <a:ext uri="{FF2B5EF4-FFF2-40B4-BE49-F238E27FC236}">
+                <a16:creationId xmlns:a16="http://schemas.microsoft.com/office/drawing/2014/main" id="{6B1A6C2B-7DD6-D083-2977-00FBD810B848}"/>
+              </a:ext>
+            </a:extLst>
+          </p:cNvPr>
+          <p:cNvSpPr/>
+          <p:nvPr/>
+        </p:nvSpPr>
+        <p:spPr>
+          <a:xfrm>
+            <a:off x="5815870" y="2383766"/>
+            <a:ext cx="1309186" cy="427639"/>
+          </a:xfrm>
+          <a:prstGeom prst="roundRect">
+            <a:avLst>
+              <a:gd name="adj" fmla="val 12191"/>
+            </a:avLst>
+          </a:prstGeom>
+          <a:solidFill>
+            <a:schemeClr val="bg1">
+              <a:lumMod val="95000"/>
+            </a:schemeClr>
+          </a:solidFill>
+          <a:ln w="12700"/>
+        </p:spPr>
+        <p:style>
+          <a:lnRef idx="2">
+            <a:schemeClr val="accent1">
+              <a:shade val="15000"/>
+            </a:schemeClr>
+          </a:lnRef>
+          <a:fillRef idx="1">
+            <a:schemeClr val="accent1"/>
+          </a:fillRef>
+          <a:effectRef idx="0">
+            <a:schemeClr val="accent1"/>
+          </a:effectRef>
+          <a:fontRef idx="minor">
+            <a:schemeClr val="lt1"/>
+          </a:fontRef>
+        </p:style>
+        <p:txBody>
+          <a:bodyPr rtlCol="0" anchor="ctr"/>
+          <a:lstStyle/>
+          <a:p>
+            <a:pPr algn="ctr"/>
+            <a:r>
+              <a:rPr kumimoji="1" lang="en-US" altLang="ko-KR" sz="800">
+                <a:solidFill>
+                  <a:schemeClr val="tx1"/>
+                </a:solidFill>
+              </a:rPr>
+              <a:t>reviews-v2</a:t>
+            </a:r>
+          </a:p>
+          <a:p>
+            <a:pPr algn="ctr"/>
+            <a:endParaRPr kumimoji="1" lang="en-US" altLang="ko-KR" sz="800">
+              <a:solidFill>
+                <a:schemeClr val="tx1"/>
+              </a:solidFill>
+            </a:endParaRPr>
+          </a:p>
+          <a:p>
+            <a:r>
+              <a:rPr kumimoji="1" lang="en-US" altLang="ko-KR" sz="800">
+                <a:solidFill>
+                  <a:schemeClr val="tx1"/>
+                </a:solidFill>
+              </a:rPr>
+              <a:t>SDS: internal-cert</a:t>
+            </a:r>
+            <a:endParaRPr kumimoji="1" lang="ko-KR" altLang="en-US" sz="800">
+              <a:solidFill>
+                <a:schemeClr val="tx1"/>
+              </a:solidFill>
+            </a:endParaRPr>
+          </a:p>
+        </p:txBody>
+      </p:sp>
+      <p:sp>
+        <p:nvSpPr>
+          <p:cNvPr id="16" name="모서리가 둥근 직사각형 15">
+            <a:extLst>
+              <a:ext uri="{FF2B5EF4-FFF2-40B4-BE49-F238E27FC236}">
+                <a16:creationId xmlns:a16="http://schemas.microsoft.com/office/drawing/2014/main" id="{9F7E33F0-F1EC-B8FC-C150-DCEB1BA954A7}"/>
+              </a:ext>
+            </a:extLst>
+          </p:cNvPr>
+          <p:cNvSpPr/>
+          <p:nvPr/>
+        </p:nvSpPr>
+        <p:spPr>
+          <a:xfrm>
+            <a:off x="5815870" y="3030537"/>
+            <a:ext cx="1309186" cy="427639"/>
+          </a:xfrm>
+          <a:prstGeom prst="roundRect">
+            <a:avLst>
+              <a:gd name="adj" fmla="val 12191"/>
+            </a:avLst>
+          </a:prstGeom>
+          <a:solidFill>
+            <a:schemeClr val="bg1">
+              <a:lumMod val="95000"/>
+            </a:schemeClr>
+          </a:solidFill>
+          <a:ln w="12700"/>
+        </p:spPr>
+        <p:style>
+          <a:lnRef idx="2">
+            <a:schemeClr val="accent1">
+              <a:shade val="15000"/>
+            </a:schemeClr>
+          </a:lnRef>
+          <a:fillRef idx="1">
+            <a:schemeClr val="accent1"/>
+          </a:fillRef>
+          <a:effectRef idx="0">
+            <a:schemeClr val="accent1"/>
+          </a:effectRef>
+          <a:fontRef idx="minor">
+            <a:schemeClr val="lt1"/>
+          </a:fontRef>
+        </p:style>
+        <p:txBody>
+          <a:bodyPr rtlCol="0" anchor="ctr"/>
+          <a:lstStyle/>
+          <a:p>
+            <a:pPr algn="ctr"/>
+            <a:r>
+              <a:rPr kumimoji="1" lang="en-US" altLang="ko-KR" sz="800">
+                <a:solidFill>
+                  <a:schemeClr val="tx1"/>
+                </a:solidFill>
+              </a:rPr>
+              <a:t>ratings</a:t>
+            </a:r>
+          </a:p>
+          <a:p>
+            <a:pPr algn="ctr"/>
+            <a:endParaRPr kumimoji="1" lang="en-US" altLang="ko-KR" sz="800">
+              <a:solidFill>
+                <a:schemeClr val="tx1"/>
+              </a:solidFill>
+            </a:endParaRPr>
+          </a:p>
+          <a:p>
+            <a:r>
+              <a:rPr kumimoji="1" lang="en-US" altLang="ko-KR" sz="800">
+                <a:solidFill>
+                  <a:schemeClr val="tx1"/>
+                </a:solidFill>
+              </a:rPr>
+              <a:t>SDS: internal-cert</a:t>
+            </a:r>
+            <a:endParaRPr kumimoji="1" lang="ko-KR" altLang="en-US" sz="800">
+              <a:solidFill>
+                <a:schemeClr val="tx1"/>
+              </a:solidFill>
+            </a:endParaRPr>
+          </a:p>
+        </p:txBody>
+      </p:sp>
+      <p:sp>
+        <p:nvSpPr>
+          <p:cNvPr id="18" name="모서리가 둥근 직사각형 17">
+            <a:extLst>
+              <a:ext uri="{FF2B5EF4-FFF2-40B4-BE49-F238E27FC236}">
+                <a16:creationId xmlns:a16="http://schemas.microsoft.com/office/drawing/2014/main" id="{CD3CA6E8-43B8-E72E-1EC1-86C3DD4AACB7}"/>
+              </a:ext>
+            </a:extLst>
+          </p:cNvPr>
+          <p:cNvSpPr/>
+          <p:nvPr/>
+        </p:nvSpPr>
+        <p:spPr>
+          <a:xfrm>
+            <a:off x="3638256" y="1459871"/>
+            <a:ext cx="1808056" cy="3446653"/>
+          </a:xfrm>
+          <a:prstGeom prst="roundRect">
+            <a:avLst>
+              <a:gd name="adj" fmla="val 4130"/>
+            </a:avLst>
+          </a:prstGeom>
+          <a:solidFill>
+            <a:schemeClr val="bg1"/>
+          </a:solidFill>
+          <a:ln w="12700">
+            <a:prstDash val="dash"/>
+          </a:ln>
+        </p:spPr>
+        <p:style>
+          <a:lnRef idx="2">
+            <a:schemeClr val="accent1">
+              <a:shade val="15000"/>
+            </a:schemeClr>
+          </a:lnRef>
+          <a:fillRef idx="1">
+            <a:schemeClr val="accent1"/>
+          </a:fillRef>
+          <a:effectRef idx="0">
+            <a:schemeClr val="accent1"/>
+          </a:effectRef>
+          <a:fontRef idx="minor">
+            <a:schemeClr val="lt1"/>
+          </a:fontRef>
+        </p:style>
+        <p:txBody>
+          <a:bodyPr rtlCol="0" anchor="t"/>
+          <a:lstStyle/>
+          <a:p>
+            <a:pPr algn="ctr"/>
+            <a:r>
+              <a:rPr kumimoji="1" lang="en-US" altLang="ko-KR" sz="900" b="1">
+                <a:solidFill>
+                  <a:schemeClr val="tx1"/>
+                </a:solidFill>
+              </a:rPr>
+              <a:t>Routes</a:t>
+            </a:r>
+            <a:endParaRPr kumimoji="1" lang="ko-KR" altLang="en-US" sz="900" b="1">
+              <a:solidFill>
+                <a:schemeClr val="tx1"/>
+              </a:solidFill>
+            </a:endParaRPr>
+          </a:p>
+        </p:txBody>
+      </p:sp>
+      <p:sp>
+        <p:nvSpPr>
+          <p:cNvPr id="19" name="모서리가 둥근 직사각형 18">
+            <a:extLst>
+              <a:ext uri="{FF2B5EF4-FFF2-40B4-BE49-F238E27FC236}">
+                <a16:creationId xmlns:a16="http://schemas.microsoft.com/office/drawing/2014/main" id="{5E673DE8-6199-A79A-BB15-55E0F87183DA}"/>
+              </a:ext>
+            </a:extLst>
+          </p:cNvPr>
+          <p:cNvSpPr/>
+          <p:nvPr/>
+        </p:nvSpPr>
+        <p:spPr>
+          <a:xfrm>
+            <a:off x="3707668" y="1736144"/>
+            <a:ext cx="1663099" cy="1508213"/>
+          </a:xfrm>
+          <a:prstGeom prst="roundRect">
+            <a:avLst>
+              <a:gd name="adj" fmla="val 4548"/>
+            </a:avLst>
+          </a:prstGeom>
+          <a:solidFill>
+            <a:schemeClr val="bg1">
+              <a:lumMod val="95000"/>
+            </a:schemeClr>
+          </a:solidFill>
+          <a:ln w="12700"/>
+        </p:spPr>
+        <p:style>
+          <a:lnRef idx="2">
+            <a:schemeClr val="accent1">
+              <a:shade val="15000"/>
+            </a:schemeClr>
+          </a:lnRef>
+          <a:fillRef idx="1">
+            <a:schemeClr val="accent1"/>
+          </a:fillRef>
+          <a:effectRef idx="0">
+            <a:schemeClr val="accent1"/>
+          </a:effectRef>
+          <a:fontRef idx="minor">
+            <a:schemeClr val="lt1"/>
+          </a:fontRef>
+        </p:style>
+        <p:txBody>
+          <a:bodyPr rtlCol="0" anchor="t"/>
+          <a:lstStyle/>
+          <a:p>
+            <a:pPr algn="ctr"/>
+            <a:r>
+              <a:rPr kumimoji="1" lang="en-US" altLang="ko-KR" sz="800">
+                <a:solidFill>
+                  <a:schemeClr val="tx1"/>
+                </a:solidFill>
+              </a:rPr>
+              <a:t>internal-routes</a:t>
+            </a:r>
+          </a:p>
+        </p:txBody>
+      </p:sp>
+      <p:sp>
+        <p:nvSpPr>
+          <p:cNvPr id="32" name="모서리가 둥근 직사각형 31">
+            <a:extLst>
+              <a:ext uri="{FF2B5EF4-FFF2-40B4-BE49-F238E27FC236}">
+                <a16:creationId xmlns:a16="http://schemas.microsoft.com/office/drawing/2014/main" id="{A17AD841-5F1E-A3DC-E53B-7FCB2C8C89B3}"/>
+              </a:ext>
+            </a:extLst>
+          </p:cNvPr>
+          <p:cNvSpPr/>
+          <p:nvPr/>
+        </p:nvSpPr>
+        <p:spPr>
+          <a:xfrm>
+            <a:off x="7492480" y="1459871"/>
+            <a:ext cx="1457470" cy="3446653"/>
+          </a:xfrm>
+          <a:prstGeom prst="roundRect">
+            <a:avLst>
+              <a:gd name="adj" fmla="val 4130"/>
+            </a:avLst>
+          </a:prstGeom>
+          <a:solidFill>
+            <a:schemeClr val="bg1"/>
+          </a:solidFill>
+          <a:ln w="12700">
+            <a:prstDash val="dash"/>
+          </a:ln>
+        </p:spPr>
+        <p:style>
+          <a:lnRef idx="2">
+            <a:schemeClr val="accent1">
+              <a:shade val="15000"/>
+            </a:schemeClr>
+          </a:lnRef>
+          <a:fillRef idx="1">
+            <a:schemeClr val="accent1"/>
+          </a:fillRef>
+          <a:effectRef idx="0">
+            <a:schemeClr val="accent1"/>
+          </a:effectRef>
+          <a:fontRef idx="minor">
+            <a:schemeClr val="lt1"/>
+          </a:fontRef>
+        </p:style>
+        <p:txBody>
+          <a:bodyPr rtlCol="0" anchor="t"/>
+          <a:lstStyle/>
+          <a:p>
+            <a:pPr algn="ctr"/>
+            <a:r>
+              <a:rPr kumimoji="1" lang="en-US" altLang="ko-KR" sz="900" b="1">
+                <a:solidFill>
+                  <a:schemeClr val="tx1"/>
+                </a:solidFill>
+              </a:rPr>
+              <a:t>Endpoints</a:t>
+            </a:r>
+            <a:endParaRPr kumimoji="1" lang="ko-KR" altLang="en-US" sz="900" b="1">
+              <a:solidFill>
+                <a:schemeClr val="tx1"/>
+              </a:solidFill>
+            </a:endParaRPr>
+          </a:p>
+        </p:txBody>
+      </p:sp>
+      <p:sp>
+        <p:nvSpPr>
+          <p:cNvPr id="33" name="모서리가 둥근 직사각형 32">
+            <a:extLst>
+              <a:ext uri="{FF2B5EF4-FFF2-40B4-BE49-F238E27FC236}">
+                <a16:creationId xmlns:a16="http://schemas.microsoft.com/office/drawing/2014/main" id="{5FC388AD-665C-C330-847E-60ED4F8D41A9}"/>
+              </a:ext>
+            </a:extLst>
+          </p:cNvPr>
+          <p:cNvSpPr/>
+          <p:nvPr/>
+        </p:nvSpPr>
+        <p:spPr>
+          <a:xfrm>
+            <a:off x="7566622" y="1736996"/>
+            <a:ext cx="1309186" cy="285430"/>
+          </a:xfrm>
+          <a:prstGeom prst="roundRect">
+            <a:avLst>
+              <a:gd name="adj" fmla="val 12191"/>
+            </a:avLst>
+          </a:prstGeom>
+          <a:solidFill>
+            <a:schemeClr val="bg1">
+              <a:lumMod val="95000"/>
+            </a:schemeClr>
+          </a:solidFill>
+          <a:ln w="12700"/>
+        </p:spPr>
+        <p:style>
+          <a:lnRef idx="2">
+            <a:schemeClr val="accent1">
+              <a:shade val="15000"/>
+            </a:schemeClr>
+          </a:lnRef>
+          <a:fillRef idx="1">
+            <a:schemeClr val="accent1"/>
+          </a:fillRef>
+          <a:effectRef idx="0">
+            <a:schemeClr val="accent1"/>
+          </a:effectRef>
+          <a:fontRef idx="minor">
+            <a:schemeClr val="lt1"/>
+          </a:fontRef>
+        </p:style>
+        <p:txBody>
+          <a:bodyPr rtlCol="0" anchor="ctr"/>
+          <a:lstStyle/>
+          <a:p>
+            <a:pPr algn="ctr"/>
+            <a:r>
+              <a:rPr kumimoji="1" lang="en-US" altLang="ko-KR" sz="800">
+                <a:solidFill>
+                  <a:schemeClr val="tx1"/>
+                </a:solidFill>
+              </a:rPr>
+              <a:t>10.0.0.11:80</a:t>
+            </a:r>
+            <a:endParaRPr kumimoji="1" lang="ko-KR" altLang="en-US" sz="800">
+              <a:solidFill>
+                <a:schemeClr val="tx1"/>
+              </a:solidFill>
+            </a:endParaRPr>
+          </a:p>
+        </p:txBody>
+      </p:sp>
+      <p:sp>
+        <p:nvSpPr>
+          <p:cNvPr id="36" name="모서리가 둥근 직사각형 35">
+            <a:extLst>
+              <a:ext uri="{FF2B5EF4-FFF2-40B4-BE49-F238E27FC236}">
+                <a16:creationId xmlns:a16="http://schemas.microsoft.com/office/drawing/2014/main" id="{7239C03C-BADA-CBF7-9C32-4B9D58BB97B5}"/>
+              </a:ext>
+            </a:extLst>
+          </p:cNvPr>
+          <p:cNvSpPr/>
+          <p:nvPr/>
+        </p:nvSpPr>
+        <p:spPr>
+          <a:xfrm>
+            <a:off x="7566622" y="2203652"/>
+            <a:ext cx="1309186" cy="285430"/>
+          </a:xfrm>
+          <a:prstGeom prst="roundRect">
+            <a:avLst>
+              <a:gd name="adj" fmla="val 12191"/>
+            </a:avLst>
+          </a:prstGeom>
+          <a:solidFill>
+            <a:schemeClr val="bg1">
+              <a:lumMod val="95000"/>
+            </a:schemeClr>
+          </a:solidFill>
+          <a:ln w="12700"/>
+        </p:spPr>
+        <p:style>
+          <a:lnRef idx="2">
+            <a:schemeClr val="accent1">
+              <a:shade val="15000"/>
+            </a:schemeClr>
+          </a:lnRef>
+          <a:fillRef idx="1">
+            <a:schemeClr val="accent1"/>
+          </a:fillRef>
+          <a:effectRef idx="0">
+            <a:schemeClr val="accent1"/>
+          </a:effectRef>
+          <a:fontRef idx="minor">
+            <a:schemeClr val="lt1"/>
+          </a:fontRef>
+        </p:style>
+        <p:txBody>
+          <a:bodyPr rtlCol="0" anchor="ctr"/>
+          <a:lstStyle/>
+          <a:p>
+            <a:pPr algn="ctr"/>
+            <a:r>
+              <a:rPr kumimoji="1" lang="en-US" altLang="ko-KR" sz="800">
+                <a:solidFill>
+                  <a:schemeClr val="tx1"/>
+                </a:solidFill>
+              </a:rPr>
+              <a:t>10.0.0.12:80</a:t>
+            </a:r>
+            <a:endParaRPr kumimoji="1" lang="ko-KR" altLang="en-US" sz="800">
+              <a:solidFill>
+                <a:schemeClr val="tx1"/>
+              </a:solidFill>
+            </a:endParaRPr>
+          </a:p>
+        </p:txBody>
+      </p:sp>
+      <p:sp>
+        <p:nvSpPr>
+          <p:cNvPr id="37" name="모서리가 둥근 직사각형 36">
+            <a:extLst>
+              <a:ext uri="{FF2B5EF4-FFF2-40B4-BE49-F238E27FC236}">
+                <a16:creationId xmlns:a16="http://schemas.microsoft.com/office/drawing/2014/main" id="{D416AB6E-69DB-7A80-2A9E-368655CEA560}"/>
+              </a:ext>
+            </a:extLst>
+          </p:cNvPr>
+          <p:cNvSpPr/>
+          <p:nvPr/>
+        </p:nvSpPr>
+        <p:spPr>
+          <a:xfrm>
+            <a:off x="7566621" y="2670308"/>
+            <a:ext cx="1309186" cy="285430"/>
+          </a:xfrm>
+          <a:prstGeom prst="roundRect">
+            <a:avLst>
+              <a:gd name="adj" fmla="val 12191"/>
+            </a:avLst>
+          </a:prstGeom>
+          <a:solidFill>
+            <a:schemeClr val="bg1">
+              <a:lumMod val="95000"/>
+            </a:schemeClr>
+          </a:solidFill>
+          <a:ln w="12700"/>
+        </p:spPr>
+        <p:style>
+          <a:lnRef idx="2">
+            <a:schemeClr val="accent1">
+              <a:shade val="15000"/>
+            </a:schemeClr>
+          </a:lnRef>
+          <a:fillRef idx="1">
+            <a:schemeClr val="accent1"/>
+          </a:fillRef>
+          <a:effectRef idx="0">
+            <a:schemeClr val="accent1"/>
+          </a:effectRef>
+          <a:fontRef idx="minor">
+            <a:schemeClr val="lt1"/>
+          </a:fontRef>
+        </p:style>
+        <p:txBody>
+          <a:bodyPr rtlCol="0" anchor="ctr"/>
+          <a:lstStyle/>
+          <a:p>
+            <a:pPr algn="ctr"/>
+            <a:r>
+              <a:rPr kumimoji="1" lang="en-US" altLang="ko-KR" sz="800">
+                <a:solidFill>
+                  <a:schemeClr val="tx1"/>
+                </a:solidFill>
+              </a:rPr>
+              <a:t>10.0.0.21:80</a:t>
+            </a:r>
+            <a:endParaRPr kumimoji="1" lang="ko-KR" altLang="en-US" sz="800">
+              <a:solidFill>
+                <a:schemeClr val="tx1"/>
+              </a:solidFill>
+            </a:endParaRPr>
+          </a:p>
+        </p:txBody>
+      </p:sp>
+      <p:sp>
+        <p:nvSpPr>
+          <p:cNvPr id="38" name="모서리가 둥근 직사각형 37">
+            <a:extLst>
+              <a:ext uri="{FF2B5EF4-FFF2-40B4-BE49-F238E27FC236}">
+                <a16:creationId xmlns:a16="http://schemas.microsoft.com/office/drawing/2014/main" id="{700C90A6-20FC-AB92-4C5C-654838F82D07}"/>
+              </a:ext>
+            </a:extLst>
+          </p:cNvPr>
+          <p:cNvSpPr/>
+          <p:nvPr/>
+        </p:nvSpPr>
+        <p:spPr>
+          <a:xfrm>
+            <a:off x="7566620" y="3136964"/>
+            <a:ext cx="1309186" cy="285430"/>
+          </a:xfrm>
+          <a:prstGeom prst="roundRect">
+            <a:avLst>
+              <a:gd name="adj" fmla="val 12191"/>
+            </a:avLst>
+          </a:prstGeom>
+          <a:solidFill>
+            <a:schemeClr val="bg1">
+              <a:lumMod val="95000"/>
+            </a:schemeClr>
+          </a:solidFill>
+          <a:ln w="12700"/>
+        </p:spPr>
+        <p:style>
+          <a:lnRef idx="2">
+            <a:schemeClr val="accent1">
+              <a:shade val="15000"/>
+            </a:schemeClr>
+          </a:lnRef>
+          <a:fillRef idx="1">
+            <a:schemeClr val="accent1"/>
+          </a:fillRef>
+          <a:effectRef idx="0">
+            <a:schemeClr val="accent1"/>
+          </a:effectRef>
+          <a:fontRef idx="minor">
+            <a:schemeClr val="lt1"/>
+          </a:fontRef>
+        </p:style>
+        <p:txBody>
+          <a:bodyPr rtlCol="0" anchor="ctr"/>
+          <a:lstStyle/>
+          <a:p>
+            <a:pPr algn="ctr"/>
+            <a:r>
+              <a:rPr kumimoji="1" lang="en-US" altLang="ko-KR" sz="800">
+                <a:solidFill>
+                  <a:schemeClr val="tx1"/>
+                </a:solidFill>
+              </a:rPr>
+              <a:t>10.0.0.31:80</a:t>
+            </a:r>
+            <a:endParaRPr kumimoji="1" lang="ko-KR" altLang="en-US" sz="800">
+              <a:solidFill>
+                <a:schemeClr val="tx1"/>
+              </a:solidFill>
+            </a:endParaRPr>
+          </a:p>
+        </p:txBody>
+      </p:sp>
+      <p:cxnSp>
+        <p:nvCxnSpPr>
+          <p:cNvPr id="46" name="직선 화살표 연결선 45">
+            <a:extLst>
+              <a:ext uri="{FF2B5EF4-FFF2-40B4-BE49-F238E27FC236}">
+                <a16:creationId xmlns:a16="http://schemas.microsoft.com/office/drawing/2014/main" id="{BAEDB093-2DC7-58DD-75EF-CB7B15978C04}"/>
+              </a:ext>
+            </a:extLst>
+          </p:cNvPr>
+          <p:cNvCxnSpPr>
+            <a:cxnSpLocks/>
+            <a:stCxn id="135" idx="3"/>
+            <a:endCxn id="16" idx="1"/>
+          </p:cNvCxnSpPr>
+          <p:nvPr/>
+        </p:nvCxnSpPr>
+        <p:spPr>
+          <a:xfrm>
+            <a:off x="5300761" y="3023318"/>
+            <a:ext cx="515109" cy="221039"/>
+          </a:xfrm>
+          <a:prstGeom prst="straightConnector1">
+            <a:avLst/>
+          </a:prstGeom>
+          <a:ln w="12700">
+            <a:solidFill>
+              <a:schemeClr val="accent1"/>
+            </a:solidFill>
+            <a:tailEnd type="triangle"/>
+          </a:ln>
+        </p:spPr>
+        <p:style>
+          <a:lnRef idx="1">
+            <a:schemeClr val="accent1"/>
+          </a:lnRef>
+          <a:fillRef idx="0">
+            <a:schemeClr val="accent1"/>
+          </a:fillRef>
+          <a:effectRef idx="0">
+            <a:schemeClr val="accent1"/>
+          </a:effectRef>
+          <a:fontRef idx="minor">
+            <a:schemeClr val="tx1"/>
+          </a:fontRef>
+        </p:style>
+      </p:cxnSp>
+      <p:cxnSp>
+        <p:nvCxnSpPr>
+          <p:cNvPr id="49" name="직선 화살표 연결선 48">
+            <a:extLst>
+              <a:ext uri="{FF2B5EF4-FFF2-40B4-BE49-F238E27FC236}">
+                <a16:creationId xmlns:a16="http://schemas.microsoft.com/office/drawing/2014/main" id="{9100AC44-4C58-4FCC-70D9-EA8DFDD1486F}"/>
+              </a:ext>
+            </a:extLst>
+          </p:cNvPr>
+          <p:cNvCxnSpPr>
+            <a:cxnSpLocks/>
+            <a:stCxn id="16" idx="3"/>
+            <a:endCxn id="38" idx="1"/>
+          </p:cNvCxnSpPr>
+          <p:nvPr/>
+        </p:nvCxnSpPr>
+        <p:spPr>
+          <a:xfrm>
+            <a:off x="7125056" y="3244357"/>
+            <a:ext cx="441564" cy="35322"/>
+          </a:xfrm>
+          <a:prstGeom prst="straightConnector1">
+            <a:avLst/>
+          </a:prstGeom>
+          <a:ln w="12700">
+            <a:solidFill>
+              <a:schemeClr val="accent1"/>
+            </a:solidFill>
+            <a:tailEnd type="triangle"/>
+          </a:ln>
+        </p:spPr>
+        <p:style>
+          <a:lnRef idx="1">
+            <a:schemeClr val="accent1"/>
+          </a:lnRef>
+          <a:fillRef idx="0">
+            <a:schemeClr val="accent1"/>
+          </a:fillRef>
+          <a:effectRef idx="0">
+            <a:schemeClr val="accent1"/>
+          </a:effectRef>
+          <a:fontRef idx="minor">
+            <a:schemeClr val="tx1"/>
+          </a:fontRef>
+        </p:style>
+      </p:cxnSp>
+      <p:cxnSp>
+        <p:nvCxnSpPr>
+          <p:cNvPr id="52" name="직선 화살표 연결선 51">
+            <a:extLst>
+              <a:ext uri="{FF2B5EF4-FFF2-40B4-BE49-F238E27FC236}">
+                <a16:creationId xmlns:a16="http://schemas.microsoft.com/office/drawing/2014/main" id="{FBCD9065-FBA4-5A76-90BB-77E36C111922}"/>
+              </a:ext>
+            </a:extLst>
+          </p:cNvPr>
+          <p:cNvCxnSpPr>
+            <a:cxnSpLocks/>
+            <a:stCxn id="15" idx="3"/>
+            <a:endCxn id="37" idx="1"/>
+          </p:cNvCxnSpPr>
+          <p:nvPr/>
+        </p:nvCxnSpPr>
+        <p:spPr>
+          <a:xfrm>
+            <a:off x="7125056" y="2597586"/>
+            <a:ext cx="441565" cy="215437"/>
+          </a:xfrm>
+          <a:prstGeom prst="straightConnector1">
+            <a:avLst/>
+          </a:prstGeom>
+          <a:ln w="12700">
+            <a:solidFill>
+              <a:schemeClr val="tx1"/>
+            </a:solidFill>
+            <a:tailEnd type="triangle"/>
+          </a:ln>
+        </p:spPr>
+        <p:style>
+          <a:lnRef idx="1">
+            <a:schemeClr val="accent1"/>
+          </a:lnRef>
+          <a:fillRef idx="0">
+            <a:schemeClr val="accent1"/>
+          </a:fillRef>
+          <a:effectRef idx="0">
+            <a:schemeClr val="accent1"/>
+          </a:effectRef>
+          <a:fontRef idx="minor">
+            <a:schemeClr val="tx1"/>
+          </a:fontRef>
+        </p:style>
+      </p:cxnSp>
+      <p:cxnSp>
+        <p:nvCxnSpPr>
+          <p:cNvPr id="55" name="직선 화살표 연결선 54">
+            <a:extLst>
+              <a:ext uri="{FF2B5EF4-FFF2-40B4-BE49-F238E27FC236}">
+                <a16:creationId xmlns:a16="http://schemas.microsoft.com/office/drawing/2014/main" id="{06B7224A-DF72-5BAA-F001-58229B48951E}"/>
+              </a:ext>
+            </a:extLst>
+          </p:cNvPr>
+          <p:cNvCxnSpPr>
+            <a:cxnSpLocks/>
+            <a:stCxn id="14" idx="3"/>
+            <a:endCxn id="36" idx="1"/>
+          </p:cNvCxnSpPr>
+          <p:nvPr/>
+        </p:nvCxnSpPr>
+        <p:spPr>
+          <a:xfrm>
+            <a:off x="7125056" y="1950815"/>
+            <a:ext cx="441566" cy="395552"/>
+          </a:xfrm>
+          <a:prstGeom prst="straightConnector1">
+            <a:avLst/>
+          </a:prstGeom>
+          <a:ln w="12700">
+            <a:solidFill>
+              <a:schemeClr val="tx1"/>
+            </a:solidFill>
+            <a:tailEnd type="triangle"/>
+          </a:ln>
+        </p:spPr>
+        <p:style>
+          <a:lnRef idx="1">
+            <a:schemeClr val="accent1"/>
+          </a:lnRef>
+          <a:fillRef idx="0">
+            <a:schemeClr val="accent1"/>
+          </a:fillRef>
+          <a:effectRef idx="0">
+            <a:schemeClr val="accent1"/>
+          </a:effectRef>
+          <a:fontRef idx="minor">
+            <a:schemeClr val="tx1"/>
+          </a:fontRef>
+        </p:style>
+      </p:cxnSp>
+      <p:cxnSp>
+        <p:nvCxnSpPr>
+          <p:cNvPr id="58" name="직선 화살표 연결선 57">
+            <a:extLst>
+              <a:ext uri="{FF2B5EF4-FFF2-40B4-BE49-F238E27FC236}">
+                <a16:creationId xmlns:a16="http://schemas.microsoft.com/office/drawing/2014/main" id="{9434721F-7541-5B6C-A2FD-86F8485E0CB6}"/>
+              </a:ext>
+            </a:extLst>
+          </p:cNvPr>
+          <p:cNvCxnSpPr>
+            <a:cxnSpLocks/>
+            <a:stCxn id="14" idx="3"/>
+            <a:endCxn id="33" idx="1"/>
+          </p:cNvCxnSpPr>
+          <p:nvPr/>
+        </p:nvCxnSpPr>
+        <p:spPr>
+          <a:xfrm flipV="1">
+            <a:off x="7125056" y="1879711"/>
+            <a:ext cx="441566" cy="71104"/>
+          </a:xfrm>
+          <a:prstGeom prst="straightConnector1">
+            <a:avLst/>
+          </a:prstGeom>
+          <a:ln w="12700">
+            <a:solidFill>
+              <a:schemeClr val="tx1"/>
+            </a:solidFill>
+            <a:tailEnd type="triangle"/>
+          </a:ln>
+        </p:spPr>
+        <p:style>
+          <a:lnRef idx="1">
+            <a:schemeClr val="accent1"/>
+          </a:lnRef>
+          <a:fillRef idx="0">
+            <a:schemeClr val="accent1"/>
+          </a:fillRef>
+          <a:effectRef idx="0">
+            <a:schemeClr val="accent1"/>
+          </a:effectRef>
+          <a:fontRef idx="minor">
+            <a:schemeClr val="tx1"/>
+          </a:fontRef>
+        </p:style>
+      </p:cxnSp>
+      <p:sp>
+        <p:nvSpPr>
+          <p:cNvPr id="2" name="모서리가 둥근 직사각형 1">
+            <a:extLst>
+              <a:ext uri="{FF2B5EF4-FFF2-40B4-BE49-F238E27FC236}">
+                <a16:creationId xmlns:a16="http://schemas.microsoft.com/office/drawing/2014/main" id="{B74D4640-65FF-38C0-ED17-9B621C0310F3}"/>
+              </a:ext>
+            </a:extLst>
+          </p:cNvPr>
+          <p:cNvSpPr/>
+          <p:nvPr/>
+        </p:nvSpPr>
+        <p:spPr>
+          <a:xfrm>
+            <a:off x="202115" y="2383766"/>
+            <a:ext cx="1318214" cy="427639"/>
+          </a:xfrm>
+          <a:prstGeom prst="roundRect">
+            <a:avLst>
+              <a:gd name="adj" fmla="val 12191"/>
+            </a:avLst>
+          </a:prstGeom>
+          <a:solidFill>
+            <a:schemeClr val="bg1">
+              <a:lumMod val="95000"/>
+            </a:schemeClr>
+          </a:solidFill>
+          <a:ln w="12700"/>
+        </p:spPr>
+        <p:style>
+          <a:lnRef idx="2">
+            <a:schemeClr val="accent1">
+              <a:shade val="15000"/>
+            </a:schemeClr>
+          </a:lnRef>
+          <a:fillRef idx="1">
+            <a:schemeClr val="accent1"/>
+          </a:fillRef>
+          <a:effectRef idx="0">
+            <a:schemeClr val="accent1"/>
+          </a:effectRef>
+          <a:fontRef idx="minor">
+            <a:schemeClr val="lt1"/>
+          </a:fontRef>
+        </p:style>
+        <p:txBody>
+          <a:bodyPr rtlCol="0" anchor="ctr"/>
+          <a:lstStyle/>
+          <a:p>
+            <a:r>
+              <a:rPr kumimoji="1" lang="en-US" altLang="ko-KR" sz="800">
+                <a:solidFill>
+                  <a:schemeClr val="tx1"/>
+                </a:solidFill>
+              </a:rPr>
+              <a:t>Server Port: 8080</a:t>
+            </a:r>
+          </a:p>
+          <a:p>
+            <a:r>
+              <a:rPr kumimoji="1" lang="en-US" altLang="ko-KR" sz="800">
+                <a:solidFill>
+                  <a:schemeClr val="tx1"/>
+                </a:solidFill>
+              </a:rPr>
+              <a:t>Host: ratings</a:t>
+            </a:r>
+            <a:endParaRPr kumimoji="1" lang="ko-KR" altLang="en-US" sz="800">
+              <a:solidFill>
+                <a:schemeClr val="tx1"/>
+              </a:solidFill>
+            </a:endParaRPr>
+          </a:p>
+        </p:txBody>
+      </p:sp>
+      <p:cxnSp>
+        <p:nvCxnSpPr>
+          <p:cNvPr id="4" name="직선 화살표 연결선 3">
+            <a:extLst>
+              <a:ext uri="{FF2B5EF4-FFF2-40B4-BE49-F238E27FC236}">
+                <a16:creationId xmlns:a16="http://schemas.microsoft.com/office/drawing/2014/main" id="{E26D3157-D5EA-F05E-92AB-FB62DF7B343A}"/>
+              </a:ext>
+            </a:extLst>
+          </p:cNvPr>
+          <p:cNvCxnSpPr>
+            <a:cxnSpLocks/>
+            <a:stCxn id="10" idx="3"/>
+            <a:endCxn id="5" idx="1"/>
+          </p:cNvCxnSpPr>
+          <p:nvPr/>
+        </p:nvCxnSpPr>
+        <p:spPr>
+          <a:xfrm>
+            <a:off x="1520329" y="1950815"/>
+            <a:ext cx="439183" cy="216475"/>
+          </a:xfrm>
+          <a:prstGeom prst="straightConnector1">
+            <a:avLst/>
+          </a:prstGeom>
+          <a:ln w="12700">
+            <a:solidFill>
+              <a:schemeClr val="tx1"/>
+            </a:solidFill>
+            <a:tailEnd type="triangle"/>
+          </a:ln>
+        </p:spPr>
+        <p:style>
+          <a:lnRef idx="1">
+            <a:schemeClr val="accent1"/>
+          </a:lnRef>
+          <a:fillRef idx="0">
+            <a:schemeClr val="accent1"/>
+          </a:fillRef>
+          <a:effectRef idx="0">
+            <a:schemeClr val="accent1"/>
+          </a:effectRef>
+          <a:fontRef idx="minor">
+            <a:schemeClr val="tx1"/>
+          </a:fontRef>
+        </p:style>
+      </p:cxnSp>
+      <p:cxnSp>
+        <p:nvCxnSpPr>
+          <p:cNvPr id="67" name="직선 화살표 연결선 66">
+            <a:extLst>
+              <a:ext uri="{FF2B5EF4-FFF2-40B4-BE49-F238E27FC236}">
+                <a16:creationId xmlns:a16="http://schemas.microsoft.com/office/drawing/2014/main" id="{109E5139-8E66-CE7F-A06F-BC513FF1AC24}"/>
+              </a:ext>
+            </a:extLst>
+          </p:cNvPr>
+          <p:cNvCxnSpPr>
+            <a:cxnSpLocks/>
+            <a:stCxn id="2" idx="3"/>
+            <a:endCxn id="5" idx="1"/>
+          </p:cNvCxnSpPr>
+          <p:nvPr/>
+        </p:nvCxnSpPr>
+        <p:spPr>
+          <a:xfrm flipV="1">
+            <a:off x="1520329" y="2167290"/>
+            <a:ext cx="439183" cy="430296"/>
+          </a:xfrm>
+          <a:prstGeom prst="straightConnector1">
+            <a:avLst/>
+          </a:prstGeom>
+          <a:ln w="12700">
+            <a:solidFill>
+              <a:schemeClr val="accent1"/>
+            </a:solidFill>
+            <a:tailEnd type="triangle"/>
+          </a:ln>
+        </p:spPr>
+        <p:style>
+          <a:lnRef idx="1">
+            <a:schemeClr val="accent1"/>
+          </a:lnRef>
+          <a:fillRef idx="0">
+            <a:schemeClr val="accent1"/>
+          </a:fillRef>
+          <a:effectRef idx="0">
+            <a:schemeClr val="accent1"/>
+          </a:effectRef>
+          <a:fontRef idx="minor">
+            <a:schemeClr val="tx1"/>
+          </a:fontRef>
+        </p:style>
+      </p:cxnSp>
+      <p:sp>
+        <p:nvSpPr>
+          <p:cNvPr id="82" name="모서리가 둥근 직사각형 81">
+            <a:extLst>
+              <a:ext uri="{FF2B5EF4-FFF2-40B4-BE49-F238E27FC236}">
+                <a16:creationId xmlns:a16="http://schemas.microsoft.com/office/drawing/2014/main" id="{6D4D7145-E36F-C806-4333-220A9B99189B}"/>
+              </a:ext>
+            </a:extLst>
+          </p:cNvPr>
+          <p:cNvSpPr/>
+          <p:nvPr/>
+        </p:nvSpPr>
+        <p:spPr>
+          <a:xfrm>
+            <a:off x="3779084" y="1991450"/>
+            <a:ext cx="1526404" cy="893492"/>
+          </a:xfrm>
+          <a:prstGeom prst="roundRect">
+            <a:avLst>
+              <a:gd name="adj" fmla="val 5175"/>
+            </a:avLst>
+          </a:prstGeom>
+          <a:solidFill>
+            <a:schemeClr val="bg1">
+              <a:lumMod val="95000"/>
+            </a:schemeClr>
+          </a:solidFill>
+          <a:ln w="12700"/>
+        </p:spPr>
+        <p:style>
+          <a:lnRef idx="2">
+            <a:schemeClr val="accent1">
+              <a:shade val="15000"/>
+            </a:schemeClr>
+          </a:lnRef>
+          <a:fillRef idx="1">
+            <a:schemeClr val="accent1"/>
+          </a:fillRef>
+          <a:effectRef idx="0">
+            <a:schemeClr val="accent1"/>
+          </a:effectRef>
+          <a:fontRef idx="minor">
+            <a:schemeClr val="lt1"/>
+          </a:fontRef>
+        </p:style>
+        <p:txBody>
+          <a:bodyPr rtlCol="0" anchor="t"/>
+          <a:lstStyle/>
+          <a:p>
+            <a:pPr algn="ctr"/>
+            <a:r>
+              <a:rPr kumimoji="1" lang="en-US" altLang="ko-KR" sz="800">
+                <a:solidFill>
+                  <a:schemeClr val="tx1"/>
+                </a:solidFill>
+              </a:rPr>
+              <a:t>Host: reviews</a:t>
+            </a:r>
+            <a:endParaRPr kumimoji="1" lang="ko-KR" altLang="en-US" sz="800">
+              <a:solidFill>
+                <a:schemeClr val="tx1"/>
+              </a:solidFill>
+            </a:endParaRPr>
+          </a:p>
+        </p:txBody>
+      </p:sp>
+      <p:sp>
+        <p:nvSpPr>
+          <p:cNvPr id="89" name="모서리가 둥근 직사각형 88">
+            <a:extLst>
+              <a:ext uri="{FF2B5EF4-FFF2-40B4-BE49-F238E27FC236}">
+                <a16:creationId xmlns:a16="http://schemas.microsoft.com/office/drawing/2014/main" id="{27F68332-D2DC-A16C-D004-31A7FD501479}"/>
+              </a:ext>
+            </a:extLst>
+          </p:cNvPr>
+          <p:cNvSpPr/>
+          <p:nvPr/>
+        </p:nvSpPr>
+        <p:spPr>
+          <a:xfrm>
+            <a:off x="3857611" y="2242250"/>
+            <a:ext cx="1378126" cy="279109"/>
+          </a:xfrm>
+          <a:prstGeom prst="roundRect">
+            <a:avLst>
+              <a:gd name="adj" fmla="val 12191"/>
+            </a:avLst>
+          </a:prstGeom>
+          <a:solidFill>
+            <a:schemeClr val="bg1">
+              <a:lumMod val="95000"/>
+            </a:schemeClr>
+          </a:solidFill>
+          <a:ln w="12700"/>
+        </p:spPr>
+        <p:style>
+          <a:lnRef idx="2">
+            <a:schemeClr val="accent1">
+              <a:shade val="15000"/>
+            </a:schemeClr>
+          </a:lnRef>
+          <a:fillRef idx="1">
+            <a:schemeClr val="accent1"/>
+          </a:fillRef>
+          <a:effectRef idx="0">
+            <a:schemeClr val="accent1"/>
+          </a:effectRef>
+          <a:fontRef idx="minor">
+            <a:schemeClr val="lt1"/>
+          </a:fontRef>
+        </p:style>
+        <p:txBody>
+          <a:bodyPr rtlCol="0" anchor="ctr"/>
+          <a:lstStyle/>
+          <a:p>
+            <a:pPr algn="ctr"/>
+            <a:r>
+              <a:rPr kumimoji="1" lang="en-US" altLang="ko-KR" sz="800">
+                <a:solidFill>
+                  <a:schemeClr val="tx1"/>
+                </a:solidFill>
+              </a:rPr>
+              <a:t>Path: /api </a:t>
+            </a:r>
+            <a:r>
+              <a:rPr kumimoji="1" lang="en-US" altLang="ko-KR" sz="800">
+                <a:solidFill>
+                  <a:schemeClr val="tx1"/>
+                </a:solidFill>
+                <a:sym typeface="Wingdings" pitchFamily="2" charset="2"/>
+              </a:rPr>
+              <a:t> </a:t>
+            </a:r>
+            <a:r>
+              <a:rPr kumimoji="1" lang="en-US" altLang="ko-KR" sz="800">
+                <a:solidFill>
+                  <a:schemeClr val="tx1"/>
+                </a:solidFill>
+              </a:rPr>
+              <a:t>v1:80, v2:20</a:t>
+            </a:r>
+            <a:endParaRPr kumimoji="1" lang="ko-KR" altLang="en-US" sz="800">
+              <a:solidFill>
+                <a:schemeClr val="tx1"/>
+              </a:solidFill>
+            </a:endParaRPr>
+          </a:p>
+        </p:txBody>
+      </p:sp>
+      <p:sp>
+        <p:nvSpPr>
+          <p:cNvPr id="100" name="모서리가 둥근 직사각형 99">
+            <a:extLst>
+              <a:ext uri="{FF2B5EF4-FFF2-40B4-BE49-F238E27FC236}">
+                <a16:creationId xmlns:a16="http://schemas.microsoft.com/office/drawing/2014/main" id="{5650BEB1-3F80-C537-4E9D-BB5DBD800C94}"/>
+              </a:ext>
+            </a:extLst>
+          </p:cNvPr>
+          <p:cNvSpPr/>
+          <p:nvPr/>
+        </p:nvSpPr>
+        <p:spPr>
+          <a:xfrm>
+            <a:off x="3852408" y="2520828"/>
+            <a:ext cx="1383328" cy="276803"/>
+          </a:xfrm>
+          <a:prstGeom prst="roundRect">
+            <a:avLst>
+              <a:gd name="adj" fmla="val 12191"/>
+            </a:avLst>
+          </a:prstGeom>
+          <a:solidFill>
+            <a:schemeClr val="bg1">
+              <a:lumMod val="95000"/>
+            </a:schemeClr>
+          </a:solidFill>
+          <a:ln w="12700"/>
+        </p:spPr>
+        <p:style>
+          <a:lnRef idx="2">
+            <a:schemeClr val="accent1">
+              <a:shade val="15000"/>
+            </a:schemeClr>
+          </a:lnRef>
+          <a:fillRef idx="1">
+            <a:schemeClr val="accent1"/>
+          </a:fillRef>
+          <a:effectRef idx="0">
+            <a:schemeClr val="accent1"/>
+          </a:effectRef>
+          <a:fontRef idx="minor">
+            <a:schemeClr val="lt1"/>
+          </a:fontRef>
+        </p:style>
+        <p:txBody>
+          <a:bodyPr rtlCol="0" anchor="ctr"/>
+          <a:lstStyle/>
+          <a:p>
+            <a:pPr algn="ctr"/>
+            <a:r>
+              <a:rPr kumimoji="1" lang="en-US" altLang="ko-KR" sz="800">
+                <a:solidFill>
+                  <a:schemeClr val="tx1"/>
+                </a:solidFill>
+              </a:rPr>
+              <a:t>Path: /* </a:t>
+            </a:r>
+            <a:r>
+              <a:rPr kumimoji="1" lang="en-US" altLang="ko-KR" sz="800">
+                <a:solidFill>
+                  <a:schemeClr val="tx1"/>
+                </a:solidFill>
+                <a:sym typeface="Wingdings" pitchFamily="2" charset="2"/>
+              </a:rPr>
+              <a:t> </a:t>
+            </a:r>
+            <a:r>
+              <a:rPr kumimoji="1" lang="en-US" altLang="ko-KR" sz="800">
+                <a:solidFill>
+                  <a:schemeClr val="tx1"/>
+                </a:solidFill>
+              </a:rPr>
+              <a:t>v1:100</a:t>
+            </a:r>
+            <a:endParaRPr kumimoji="1" lang="ko-KR" altLang="en-US" sz="800">
+              <a:solidFill>
+                <a:schemeClr val="tx1"/>
+              </a:solidFill>
+            </a:endParaRPr>
+          </a:p>
+        </p:txBody>
+      </p:sp>
+      <p:sp>
+        <p:nvSpPr>
+          <p:cNvPr id="135" name="모서리가 둥근 직사각형 134">
+            <a:extLst>
+              <a:ext uri="{FF2B5EF4-FFF2-40B4-BE49-F238E27FC236}">
+                <a16:creationId xmlns:a16="http://schemas.microsoft.com/office/drawing/2014/main" id="{83F59F73-BE1E-B4D7-2EED-0556DABA986E}"/>
+              </a:ext>
+            </a:extLst>
+          </p:cNvPr>
+          <p:cNvSpPr/>
+          <p:nvPr/>
+        </p:nvSpPr>
+        <p:spPr>
+          <a:xfrm>
+            <a:off x="3774357" y="2882582"/>
+            <a:ext cx="1526404" cy="281472"/>
+          </a:xfrm>
+          <a:prstGeom prst="roundRect">
+            <a:avLst>
+              <a:gd name="adj" fmla="val 15966"/>
+            </a:avLst>
+          </a:prstGeom>
+          <a:solidFill>
+            <a:schemeClr val="bg1">
+              <a:lumMod val="95000"/>
+            </a:schemeClr>
+          </a:solidFill>
+          <a:ln w="12700"/>
+        </p:spPr>
+        <p:style>
+          <a:lnRef idx="2">
+            <a:schemeClr val="accent1">
+              <a:shade val="15000"/>
+            </a:schemeClr>
+          </a:lnRef>
+          <a:fillRef idx="1">
+            <a:schemeClr val="accent1"/>
+          </a:fillRef>
+          <a:effectRef idx="0">
+            <a:schemeClr val="accent1"/>
+          </a:effectRef>
+          <a:fontRef idx="minor">
+            <a:schemeClr val="lt1"/>
+          </a:fontRef>
+        </p:style>
+        <p:txBody>
+          <a:bodyPr rtlCol="0" anchor="ctr"/>
+          <a:lstStyle/>
+          <a:p>
+            <a:pPr algn="ctr"/>
+            <a:r>
+              <a:rPr kumimoji="1" lang="en-US" altLang="ko-KR" sz="800">
+                <a:solidFill>
+                  <a:schemeClr val="tx1"/>
+                </a:solidFill>
+              </a:rPr>
+              <a:t>Host: ratings </a:t>
+            </a:r>
+            <a:r>
+              <a:rPr kumimoji="1" lang="en-US" altLang="ko-KR" sz="800">
+                <a:solidFill>
+                  <a:schemeClr val="tx1"/>
+                </a:solidFill>
+                <a:sym typeface="Wingdings" pitchFamily="2" charset="2"/>
+              </a:rPr>
+              <a:t> ratings:100</a:t>
+            </a:r>
+            <a:endParaRPr kumimoji="1" lang="ko-KR" altLang="en-US" sz="800">
+              <a:solidFill>
+                <a:schemeClr val="tx1"/>
+              </a:solidFill>
+            </a:endParaRPr>
+          </a:p>
+        </p:txBody>
+      </p:sp>
+      <p:cxnSp>
+        <p:nvCxnSpPr>
+          <p:cNvPr id="143" name="직선 화살표 연결선 142">
+            <a:extLst>
+              <a:ext uri="{FF2B5EF4-FFF2-40B4-BE49-F238E27FC236}">
+                <a16:creationId xmlns:a16="http://schemas.microsoft.com/office/drawing/2014/main" id="{057413CB-F32B-48DB-0B44-07734D0BF277}"/>
+              </a:ext>
+            </a:extLst>
+          </p:cNvPr>
+          <p:cNvCxnSpPr>
+            <a:cxnSpLocks/>
+            <a:stCxn id="5" idx="3"/>
+            <a:endCxn id="89" idx="1"/>
+          </p:cNvCxnSpPr>
+          <p:nvPr/>
+        </p:nvCxnSpPr>
+        <p:spPr>
+          <a:xfrm>
+            <a:off x="3268698" y="2167290"/>
+            <a:ext cx="588913" cy="214515"/>
+          </a:xfrm>
+          <a:prstGeom prst="straightConnector1">
+            <a:avLst/>
+          </a:prstGeom>
+          <a:ln w="12700">
+            <a:solidFill>
+              <a:schemeClr val="tx1"/>
+            </a:solidFill>
+            <a:tailEnd type="triangle"/>
+          </a:ln>
+        </p:spPr>
+        <p:style>
+          <a:lnRef idx="1">
+            <a:schemeClr val="accent1"/>
+          </a:lnRef>
+          <a:fillRef idx="0">
+            <a:schemeClr val="accent1"/>
+          </a:fillRef>
+          <a:effectRef idx="0">
+            <a:schemeClr val="accent1"/>
+          </a:effectRef>
+          <a:fontRef idx="minor">
+            <a:schemeClr val="tx1"/>
+          </a:fontRef>
+        </p:style>
+      </p:cxnSp>
+      <p:cxnSp>
+        <p:nvCxnSpPr>
+          <p:cNvPr id="146" name="직선 화살표 연결선 145">
+            <a:extLst>
+              <a:ext uri="{FF2B5EF4-FFF2-40B4-BE49-F238E27FC236}">
+                <a16:creationId xmlns:a16="http://schemas.microsoft.com/office/drawing/2014/main" id="{4A2103FD-7404-7ADE-035C-076047247F6E}"/>
+              </a:ext>
+            </a:extLst>
+          </p:cNvPr>
+          <p:cNvCxnSpPr>
+            <a:cxnSpLocks/>
+            <a:stCxn id="89" idx="3"/>
+            <a:endCxn id="14" idx="1"/>
+          </p:cNvCxnSpPr>
+          <p:nvPr/>
+        </p:nvCxnSpPr>
+        <p:spPr>
+          <a:xfrm flipV="1">
+            <a:off x="5235737" y="1950815"/>
+            <a:ext cx="580133" cy="430990"/>
+          </a:xfrm>
+          <a:prstGeom prst="straightConnector1">
+            <a:avLst/>
+          </a:prstGeom>
+          <a:ln w="12700">
+            <a:solidFill>
+              <a:schemeClr val="tx1"/>
+            </a:solidFill>
+            <a:tailEnd type="triangle"/>
+          </a:ln>
+        </p:spPr>
+        <p:style>
+          <a:lnRef idx="1">
+            <a:schemeClr val="accent1"/>
+          </a:lnRef>
+          <a:fillRef idx="0">
+            <a:schemeClr val="accent1"/>
+          </a:fillRef>
+          <a:effectRef idx="0">
+            <a:schemeClr val="accent1"/>
+          </a:effectRef>
+          <a:fontRef idx="minor">
+            <a:schemeClr val="tx1"/>
+          </a:fontRef>
+        </p:style>
+      </p:cxnSp>
+      <p:cxnSp>
+        <p:nvCxnSpPr>
+          <p:cNvPr id="149" name="직선 화살표 연결선 148">
+            <a:extLst>
+              <a:ext uri="{FF2B5EF4-FFF2-40B4-BE49-F238E27FC236}">
+                <a16:creationId xmlns:a16="http://schemas.microsoft.com/office/drawing/2014/main" id="{50D339B1-2883-A975-FABC-A767AC6E8436}"/>
+              </a:ext>
+            </a:extLst>
+          </p:cNvPr>
+          <p:cNvCxnSpPr>
+            <a:cxnSpLocks/>
+            <a:stCxn id="89" idx="3"/>
+            <a:endCxn id="15" idx="1"/>
+          </p:cNvCxnSpPr>
+          <p:nvPr/>
+        </p:nvCxnSpPr>
+        <p:spPr>
+          <a:xfrm>
+            <a:off x="5235737" y="2381805"/>
+            <a:ext cx="580133" cy="215781"/>
+          </a:xfrm>
+          <a:prstGeom prst="straightConnector1">
+            <a:avLst/>
+          </a:prstGeom>
+          <a:ln w="12700">
+            <a:solidFill>
+              <a:schemeClr val="tx1"/>
+            </a:solidFill>
+            <a:tailEnd type="triangle"/>
+          </a:ln>
+        </p:spPr>
+        <p:style>
+          <a:lnRef idx="1">
+            <a:schemeClr val="accent1"/>
+          </a:lnRef>
+          <a:fillRef idx="0">
+            <a:schemeClr val="accent1"/>
+          </a:fillRef>
+          <a:effectRef idx="0">
+            <a:schemeClr val="accent1"/>
+          </a:effectRef>
+          <a:fontRef idx="minor">
+            <a:schemeClr val="tx1"/>
+          </a:fontRef>
+        </p:style>
+      </p:cxnSp>
+      <p:cxnSp>
+        <p:nvCxnSpPr>
+          <p:cNvPr id="189" name="직선 화살표 연결선 188">
+            <a:extLst>
+              <a:ext uri="{FF2B5EF4-FFF2-40B4-BE49-F238E27FC236}">
+                <a16:creationId xmlns:a16="http://schemas.microsoft.com/office/drawing/2014/main" id="{BBEE1DFB-86AF-77E6-8442-E49568F9A8E0}"/>
+              </a:ext>
+            </a:extLst>
+          </p:cNvPr>
+          <p:cNvCxnSpPr>
+            <a:cxnSpLocks/>
+            <a:stCxn id="5" idx="3"/>
+            <a:endCxn id="135" idx="1"/>
+          </p:cNvCxnSpPr>
+          <p:nvPr/>
+        </p:nvCxnSpPr>
+        <p:spPr>
+          <a:xfrm>
+            <a:off x="3268698" y="2167290"/>
+            <a:ext cx="505659" cy="856028"/>
+          </a:xfrm>
+          <a:prstGeom prst="straightConnector1">
+            <a:avLst/>
+          </a:prstGeom>
+          <a:ln w="12700">
+            <a:solidFill>
+              <a:schemeClr val="accent1"/>
+            </a:solidFill>
+            <a:tailEnd type="triangle"/>
+          </a:ln>
+        </p:spPr>
+        <p:style>
+          <a:lnRef idx="1">
+            <a:schemeClr val="accent1"/>
+          </a:lnRef>
+          <a:fillRef idx="0">
+            <a:schemeClr val="accent1"/>
+          </a:fillRef>
+          <a:effectRef idx="0">
+            <a:schemeClr val="accent1"/>
+          </a:effectRef>
+          <a:fontRef idx="minor">
+            <a:schemeClr val="tx1"/>
+          </a:fontRef>
+        </p:style>
+      </p:cxnSp>
+      <p:sp>
+        <p:nvSpPr>
+          <p:cNvPr id="199" name="모서리가 둥근 직사각형 198">
+            <a:extLst>
+              <a:ext uri="{FF2B5EF4-FFF2-40B4-BE49-F238E27FC236}">
+                <a16:creationId xmlns:a16="http://schemas.microsoft.com/office/drawing/2014/main" id="{DA71F189-CA29-3246-6F57-948AE1D0BDE7}"/>
+              </a:ext>
+            </a:extLst>
+          </p:cNvPr>
+          <p:cNvSpPr/>
+          <p:nvPr/>
+        </p:nvSpPr>
+        <p:spPr>
+          <a:xfrm>
+            <a:off x="202115" y="3433178"/>
+            <a:ext cx="1318214" cy="427639"/>
+          </a:xfrm>
+          <a:prstGeom prst="roundRect">
+            <a:avLst>
+              <a:gd name="adj" fmla="val 12191"/>
+            </a:avLst>
+          </a:prstGeom>
+          <a:solidFill>
+            <a:schemeClr val="bg1">
+              <a:lumMod val="95000"/>
+            </a:schemeClr>
+          </a:solidFill>
+          <a:ln w="12700"/>
+        </p:spPr>
+        <p:style>
+          <a:lnRef idx="2">
+            <a:schemeClr val="accent1">
+              <a:shade val="15000"/>
+            </a:schemeClr>
+          </a:lnRef>
+          <a:fillRef idx="1">
+            <a:schemeClr val="accent1"/>
+          </a:fillRef>
+          <a:effectRef idx="0">
+            <a:schemeClr val="accent1"/>
+          </a:effectRef>
+          <a:fontRef idx="minor">
+            <a:schemeClr val="lt1"/>
+          </a:fontRef>
+        </p:style>
+        <p:txBody>
+          <a:bodyPr rtlCol="0" anchor="ctr"/>
+          <a:lstStyle/>
+          <a:p>
+            <a:r>
+              <a:rPr kumimoji="1" lang="en-US" altLang="ko-KR" sz="800">
+                <a:solidFill>
+                  <a:schemeClr val="tx1"/>
+                </a:solidFill>
+              </a:rPr>
+              <a:t>Server Port: 443</a:t>
+            </a:r>
+          </a:p>
+          <a:p>
+            <a:r>
+              <a:rPr kumimoji="1" lang="en-US" altLang="ko-KR" sz="800">
+                <a:solidFill>
+                  <a:schemeClr val="tx1"/>
+                </a:solidFill>
+              </a:rPr>
+              <a:t>SNI: web.com</a:t>
+            </a:r>
+            <a:endParaRPr kumimoji="1" lang="ko-KR" altLang="en-US" sz="800">
+              <a:solidFill>
+                <a:schemeClr val="tx1"/>
+              </a:solidFill>
+            </a:endParaRPr>
+          </a:p>
+        </p:txBody>
+      </p:sp>
+      <p:sp>
+        <p:nvSpPr>
+          <p:cNvPr id="207" name="모서리가 둥근 직사각형 206">
+            <a:extLst>
+              <a:ext uri="{FF2B5EF4-FFF2-40B4-BE49-F238E27FC236}">
+                <a16:creationId xmlns:a16="http://schemas.microsoft.com/office/drawing/2014/main" id="{1F9EEEB8-1548-486E-1010-8F5DBDCCFFE8}"/>
+              </a:ext>
+            </a:extLst>
+          </p:cNvPr>
+          <p:cNvSpPr/>
+          <p:nvPr/>
+        </p:nvSpPr>
+        <p:spPr>
+          <a:xfrm>
+            <a:off x="1959512" y="3433178"/>
+            <a:ext cx="1309186" cy="884204"/>
+          </a:xfrm>
+          <a:prstGeom prst="roundRect">
+            <a:avLst>
+              <a:gd name="adj" fmla="val 7913"/>
+            </a:avLst>
+          </a:prstGeom>
+          <a:solidFill>
+            <a:schemeClr val="bg1">
+              <a:lumMod val="95000"/>
+            </a:schemeClr>
+          </a:solidFill>
+          <a:ln w="12700"/>
+        </p:spPr>
+        <p:style>
+          <a:lnRef idx="2">
+            <a:schemeClr val="accent1">
+              <a:shade val="15000"/>
+            </a:schemeClr>
+          </a:lnRef>
+          <a:fillRef idx="1">
+            <a:schemeClr val="accent1"/>
+          </a:fillRef>
+          <a:effectRef idx="0">
+            <a:schemeClr val="accent1"/>
+          </a:effectRef>
+          <a:fontRef idx="minor">
+            <a:schemeClr val="lt1"/>
+          </a:fontRef>
+        </p:style>
+        <p:txBody>
+          <a:bodyPr rtlCol="0" anchor="t"/>
+          <a:lstStyle/>
+          <a:p>
+            <a:pPr algn="ctr"/>
+            <a:r>
+              <a:rPr kumimoji="1" lang="en-US" altLang="ko-KR" sz="800">
+                <a:solidFill>
+                  <a:schemeClr val="tx1"/>
+                </a:solidFill>
+              </a:rPr>
+              <a:t>external-listener</a:t>
+            </a:r>
+          </a:p>
+          <a:p>
+            <a:pPr algn="ctr"/>
+            <a:endParaRPr kumimoji="1" lang="en-US" altLang="ko-KR" sz="800">
+              <a:solidFill>
+                <a:schemeClr val="tx1"/>
+              </a:solidFill>
+            </a:endParaRPr>
+          </a:p>
+          <a:p>
+            <a:r>
+              <a:rPr kumimoji="1" lang="en-US" altLang="ko-KR" sz="800">
+                <a:solidFill>
+                  <a:schemeClr val="tx1"/>
+                </a:solidFill>
+              </a:rPr>
+              <a:t>mTLS</a:t>
+            </a:r>
+          </a:p>
+        </p:txBody>
+      </p:sp>
+      <p:sp>
+        <p:nvSpPr>
+          <p:cNvPr id="208" name="모서리가 둥근 직사각형 207">
+            <a:extLst>
+              <a:ext uri="{FF2B5EF4-FFF2-40B4-BE49-F238E27FC236}">
+                <a16:creationId xmlns:a16="http://schemas.microsoft.com/office/drawing/2014/main" id="{F99610F2-F62B-E1F6-DE74-27C4D05E2028}"/>
+              </a:ext>
+            </a:extLst>
+          </p:cNvPr>
+          <p:cNvSpPr/>
+          <p:nvPr/>
+        </p:nvSpPr>
+        <p:spPr>
+          <a:xfrm>
+            <a:off x="3707668" y="3430648"/>
+            <a:ext cx="1663099" cy="600689"/>
+          </a:xfrm>
+          <a:prstGeom prst="roundRect">
+            <a:avLst>
+              <a:gd name="adj" fmla="val 6914"/>
+            </a:avLst>
+          </a:prstGeom>
+          <a:solidFill>
+            <a:schemeClr val="bg1">
+              <a:lumMod val="95000"/>
+            </a:schemeClr>
+          </a:solidFill>
+          <a:ln w="12700"/>
+        </p:spPr>
+        <p:style>
+          <a:lnRef idx="2">
+            <a:schemeClr val="accent1">
+              <a:shade val="15000"/>
+            </a:schemeClr>
+          </a:lnRef>
+          <a:fillRef idx="1">
+            <a:schemeClr val="accent1"/>
+          </a:fillRef>
+          <a:effectRef idx="0">
+            <a:schemeClr val="accent1"/>
+          </a:effectRef>
+          <a:fontRef idx="minor">
+            <a:schemeClr val="lt1"/>
+          </a:fontRef>
+        </p:style>
+        <p:txBody>
+          <a:bodyPr rtlCol="0" anchor="t"/>
+          <a:lstStyle/>
+          <a:p>
+            <a:pPr algn="ctr"/>
+            <a:r>
+              <a:rPr kumimoji="1" lang="en-US" altLang="ko-KR" sz="800">
+                <a:solidFill>
+                  <a:schemeClr val="tx1"/>
+                </a:solidFill>
+              </a:rPr>
+              <a:t>external-routes</a:t>
+            </a:r>
+          </a:p>
+        </p:txBody>
+      </p:sp>
+      <p:sp>
+        <p:nvSpPr>
+          <p:cNvPr id="223" name="모서리가 둥근 직사각형 222">
+            <a:extLst>
+              <a:ext uri="{FF2B5EF4-FFF2-40B4-BE49-F238E27FC236}">
+                <a16:creationId xmlns:a16="http://schemas.microsoft.com/office/drawing/2014/main" id="{AA07D270-5A34-75E0-6D72-053F0B3712CB}"/>
+              </a:ext>
+            </a:extLst>
+          </p:cNvPr>
+          <p:cNvSpPr/>
+          <p:nvPr/>
+        </p:nvSpPr>
+        <p:spPr>
+          <a:xfrm>
+            <a:off x="3774357" y="3684995"/>
+            <a:ext cx="1526404" cy="281472"/>
+          </a:xfrm>
+          <a:prstGeom prst="roundRect">
+            <a:avLst>
+              <a:gd name="adj" fmla="val 15966"/>
+            </a:avLst>
+          </a:prstGeom>
+          <a:solidFill>
+            <a:schemeClr val="bg1">
+              <a:lumMod val="95000"/>
+            </a:schemeClr>
+          </a:solidFill>
+          <a:ln w="12700"/>
+        </p:spPr>
+        <p:style>
+          <a:lnRef idx="2">
+            <a:schemeClr val="accent1">
+              <a:shade val="15000"/>
+            </a:schemeClr>
+          </a:lnRef>
+          <a:fillRef idx="1">
+            <a:schemeClr val="accent1"/>
+          </a:fillRef>
+          <a:effectRef idx="0">
+            <a:schemeClr val="accent1"/>
+          </a:effectRef>
+          <a:fontRef idx="minor">
+            <a:schemeClr val="lt1"/>
+          </a:fontRef>
+        </p:style>
+        <p:txBody>
+          <a:bodyPr rtlCol="0" anchor="ctr"/>
+          <a:lstStyle/>
+          <a:p>
+            <a:pPr algn="ctr"/>
+            <a:r>
+              <a:rPr kumimoji="1" lang="en-US" altLang="ko-KR" sz="800">
+                <a:solidFill>
+                  <a:schemeClr val="tx1"/>
+                </a:solidFill>
+              </a:rPr>
+              <a:t>Host: web.com </a:t>
+            </a:r>
+            <a:r>
+              <a:rPr kumimoji="1" lang="en-US" altLang="ko-KR" sz="800">
+                <a:solidFill>
+                  <a:schemeClr val="tx1"/>
+                </a:solidFill>
+                <a:sym typeface="Wingdings" pitchFamily="2" charset="2"/>
+              </a:rPr>
+              <a:t> web</a:t>
+            </a:r>
+          </a:p>
+        </p:txBody>
+      </p:sp>
+      <p:sp>
+        <p:nvSpPr>
+          <p:cNvPr id="230" name="모서리가 둥근 직사각형 229">
+            <a:extLst>
+              <a:ext uri="{FF2B5EF4-FFF2-40B4-BE49-F238E27FC236}">
+                <a16:creationId xmlns:a16="http://schemas.microsoft.com/office/drawing/2014/main" id="{1445548D-CCAB-20EC-767E-A0BFACA7AAD4}"/>
+              </a:ext>
+            </a:extLst>
+          </p:cNvPr>
+          <p:cNvSpPr/>
+          <p:nvPr/>
+        </p:nvSpPr>
+        <p:spPr>
+          <a:xfrm>
+            <a:off x="5815869" y="3711013"/>
+            <a:ext cx="1309186" cy="427639"/>
+          </a:xfrm>
+          <a:prstGeom prst="roundRect">
+            <a:avLst>
+              <a:gd name="adj" fmla="val 12191"/>
+            </a:avLst>
+          </a:prstGeom>
+          <a:solidFill>
+            <a:schemeClr val="bg1">
+              <a:lumMod val="95000"/>
+            </a:schemeClr>
+          </a:solidFill>
+          <a:ln w="12700"/>
+        </p:spPr>
+        <p:style>
+          <a:lnRef idx="2">
+            <a:schemeClr val="accent1">
+              <a:shade val="15000"/>
+            </a:schemeClr>
+          </a:lnRef>
+          <a:fillRef idx="1">
+            <a:schemeClr val="accent1"/>
+          </a:fillRef>
+          <a:effectRef idx="0">
+            <a:schemeClr val="accent1"/>
+          </a:effectRef>
+          <a:fontRef idx="minor">
+            <a:schemeClr val="lt1"/>
+          </a:fontRef>
+        </p:style>
+        <p:txBody>
+          <a:bodyPr rtlCol="0" anchor="ctr"/>
+          <a:lstStyle/>
+          <a:p>
+            <a:pPr algn="ctr"/>
+            <a:r>
+              <a:rPr kumimoji="1" lang="en-US" altLang="ko-KR" sz="800">
+                <a:solidFill>
+                  <a:schemeClr val="tx1"/>
+                </a:solidFill>
+              </a:rPr>
+              <a:t>web</a:t>
+            </a:r>
+          </a:p>
+          <a:p>
+            <a:pPr algn="ctr"/>
+            <a:endParaRPr kumimoji="1" lang="en-US" altLang="ko-KR" sz="800">
+              <a:solidFill>
+                <a:schemeClr val="tx1"/>
+              </a:solidFill>
+            </a:endParaRPr>
+          </a:p>
+          <a:p>
+            <a:r>
+              <a:rPr kumimoji="1" lang="en-US" altLang="ko-KR" sz="800">
+                <a:solidFill>
+                  <a:schemeClr val="tx1"/>
+                </a:solidFill>
+              </a:rPr>
+              <a:t>SDS: internal-cert</a:t>
+            </a:r>
+            <a:endParaRPr kumimoji="1" lang="ko-KR" altLang="en-US" sz="800">
+              <a:solidFill>
+                <a:schemeClr val="tx1"/>
+              </a:solidFill>
+            </a:endParaRPr>
+          </a:p>
+        </p:txBody>
+      </p:sp>
+      <p:cxnSp>
+        <p:nvCxnSpPr>
+          <p:cNvPr id="231" name="직선 화살표 연결선 230">
+            <a:extLst>
+              <a:ext uri="{FF2B5EF4-FFF2-40B4-BE49-F238E27FC236}">
+                <a16:creationId xmlns:a16="http://schemas.microsoft.com/office/drawing/2014/main" id="{CE45592A-013E-2AB5-C71A-54486F558BB2}"/>
+              </a:ext>
+            </a:extLst>
+          </p:cNvPr>
+          <p:cNvCxnSpPr>
+            <a:cxnSpLocks/>
+            <a:stCxn id="223" idx="3"/>
+            <a:endCxn id="230" idx="1"/>
+          </p:cNvCxnSpPr>
+          <p:nvPr/>
+        </p:nvCxnSpPr>
+        <p:spPr>
+          <a:xfrm>
+            <a:off x="5300761" y="3825731"/>
+            <a:ext cx="515108" cy="99102"/>
+          </a:xfrm>
+          <a:prstGeom prst="straightConnector1">
+            <a:avLst/>
+          </a:prstGeom>
+          <a:ln w="12700">
+            <a:solidFill>
+              <a:schemeClr val="accent3"/>
+            </a:solidFill>
+            <a:tailEnd type="triangle"/>
+          </a:ln>
+        </p:spPr>
+        <p:style>
+          <a:lnRef idx="1">
+            <a:schemeClr val="accent1"/>
+          </a:lnRef>
+          <a:fillRef idx="0">
+            <a:schemeClr val="accent1"/>
+          </a:fillRef>
+          <a:effectRef idx="0">
+            <a:schemeClr val="accent1"/>
+          </a:effectRef>
+          <a:fontRef idx="minor">
+            <a:schemeClr val="tx1"/>
+          </a:fontRef>
+        </p:style>
+      </p:cxnSp>
+      <p:sp>
+        <p:nvSpPr>
+          <p:cNvPr id="235" name="모서리가 둥근 직사각형 234">
+            <a:extLst>
+              <a:ext uri="{FF2B5EF4-FFF2-40B4-BE49-F238E27FC236}">
+                <a16:creationId xmlns:a16="http://schemas.microsoft.com/office/drawing/2014/main" id="{27030E50-520A-F70D-8B8D-A08BB5D00ECE}"/>
+              </a:ext>
+            </a:extLst>
+          </p:cNvPr>
+          <p:cNvSpPr/>
+          <p:nvPr/>
+        </p:nvSpPr>
+        <p:spPr>
+          <a:xfrm>
+            <a:off x="5815869" y="4363797"/>
+            <a:ext cx="1309186" cy="427639"/>
+          </a:xfrm>
+          <a:prstGeom prst="roundRect">
+            <a:avLst>
+              <a:gd name="adj" fmla="val 12191"/>
+            </a:avLst>
+          </a:prstGeom>
+          <a:solidFill>
+            <a:schemeClr val="bg1">
+              <a:lumMod val="95000"/>
+            </a:schemeClr>
+          </a:solidFill>
+          <a:ln w="12700"/>
+        </p:spPr>
+        <p:style>
+          <a:lnRef idx="2">
+            <a:schemeClr val="accent1">
+              <a:shade val="15000"/>
+            </a:schemeClr>
+          </a:lnRef>
+          <a:fillRef idx="1">
+            <a:schemeClr val="accent1"/>
+          </a:fillRef>
+          <a:effectRef idx="0">
+            <a:schemeClr val="accent1"/>
+          </a:effectRef>
+          <a:fontRef idx="minor">
+            <a:schemeClr val="lt1"/>
+          </a:fontRef>
+        </p:style>
+        <p:txBody>
+          <a:bodyPr rtlCol="0" anchor="ctr"/>
+          <a:lstStyle/>
+          <a:p>
+            <a:pPr algn="ctr"/>
+            <a:r>
+              <a:rPr kumimoji="1" lang="en-US" altLang="ko-KR" sz="800">
+                <a:solidFill>
+                  <a:schemeClr val="tx1"/>
+                </a:solidFill>
+              </a:rPr>
+              <a:t>kafka</a:t>
+            </a:r>
+          </a:p>
+          <a:p>
+            <a:pPr algn="ctr"/>
+            <a:endParaRPr kumimoji="1" lang="en-US" altLang="ko-KR" sz="800">
+              <a:solidFill>
+                <a:schemeClr val="tx1"/>
+              </a:solidFill>
+            </a:endParaRPr>
+          </a:p>
+          <a:p>
+            <a:r>
+              <a:rPr kumimoji="1" lang="en-US" altLang="ko-KR" sz="800">
+                <a:solidFill>
+                  <a:schemeClr val="tx1"/>
+                </a:solidFill>
+              </a:rPr>
+              <a:t>SDS: internal-cert</a:t>
+            </a:r>
+            <a:endParaRPr kumimoji="1" lang="ko-KR" altLang="en-US" sz="800">
+              <a:solidFill>
+                <a:schemeClr val="tx1"/>
+              </a:solidFill>
+            </a:endParaRPr>
+          </a:p>
+        </p:txBody>
+      </p:sp>
+      <p:sp>
+        <p:nvSpPr>
+          <p:cNvPr id="238" name="모서리가 둥근 직사각형 237">
+            <a:extLst>
+              <a:ext uri="{FF2B5EF4-FFF2-40B4-BE49-F238E27FC236}">
+                <a16:creationId xmlns:a16="http://schemas.microsoft.com/office/drawing/2014/main" id="{1A1129FE-3C54-B3AD-C4B1-3DE7E617AEC1}"/>
+              </a:ext>
+            </a:extLst>
+          </p:cNvPr>
+          <p:cNvSpPr/>
+          <p:nvPr/>
+        </p:nvSpPr>
+        <p:spPr>
+          <a:xfrm>
+            <a:off x="7566620" y="3607058"/>
+            <a:ext cx="1309186" cy="285430"/>
+          </a:xfrm>
+          <a:prstGeom prst="roundRect">
+            <a:avLst>
+              <a:gd name="adj" fmla="val 12191"/>
+            </a:avLst>
+          </a:prstGeom>
+          <a:solidFill>
+            <a:schemeClr val="bg1">
+              <a:lumMod val="95000"/>
+            </a:schemeClr>
+          </a:solidFill>
+          <a:ln w="12700"/>
+        </p:spPr>
+        <p:style>
+          <a:lnRef idx="2">
+            <a:schemeClr val="accent1">
+              <a:shade val="15000"/>
+            </a:schemeClr>
+          </a:lnRef>
+          <a:fillRef idx="1">
+            <a:schemeClr val="accent1"/>
+          </a:fillRef>
+          <a:effectRef idx="0">
+            <a:schemeClr val="accent1"/>
+          </a:effectRef>
+          <a:fontRef idx="minor">
+            <a:schemeClr val="lt1"/>
+          </a:fontRef>
+        </p:style>
+        <p:txBody>
+          <a:bodyPr rtlCol="0" anchor="ctr"/>
+          <a:lstStyle/>
+          <a:p>
+            <a:pPr algn="ctr"/>
+            <a:r>
+              <a:rPr kumimoji="1" lang="en-US" altLang="ko-KR" sz="800">
+                <a:solidFill>
+                  <a:schemeClr val="tx1"/>
+                </a:solidFill>
+              </a:rPr>
+              <a:t>10.0.0.41:80</a:t>
+            </a:r>
+            <a:endParaRPr kumimoji="1" lang="ko-KR" altLang="en-US" sz="800">
+              <a:solidFill>
+                <a:schemeClr val="tx1"/>
+              </a:solidFill>
+            </a:endParaRPr>
+          </a:p>
+        </p:txBody>
+      </p:sp>
+      <p:sp>
+        <p:nvSpPr>
+          <p:cNvPr id="243" name="모서리가 둥근 직사각형 242">
+            <a:extLst>
+              <a:ext uri="{FF2B5EF4-FFF2-40B4-BE49-F238E27FC236}">
+                <a16:creationId xmlns:a16="http://schemas.microsoft.com/office/drawing/2014/main" id="{E46561A2-2048-66CA-E35E-880C0E9D473E}"/>
+              </a:ext>
+            </a:extLst>
+          </p:cNvPr>
+          <p:cNvSpPr/>
+          <p:nvPr/>
+        </p:nvSpPr>
+        <p:spPr>
+          <a:xfrm>
+            <a:off x="7566620" y="4078367"/>
+            <a:ext cx="1309186" cy="285430"/>
+          </a:xfrm>
+          <a:prstGeom prst="roundRect">
+            <a:avLst>
+              <a:gd name="adj" fmla="val 12191"/>
+            </a:avLst>
+          </a:prstGeom>
+          <a:solidFill>
+            <a:schemeClr val="bg1">
+              <a:lumMod val="95000"/>
+            </a:schemeClr>
+          </a:solidFill>
+          <a:ln w="12700"/>
+        </p:spPr>
+        <p:style>
+          <a:lnRef idx="2">
+            <a:schemeClr val="accent1">
+              <a:shade val="15000"/>
+            </a:schemeClr>
+          </a:lnRef>
+          <a:fillRef idx="1">
+            <a:schemeClr val="accent1"/>
+          </a:fillRef>
+          <a:effectRef idx="0">
+            <a:schemeClr val="accent1"/>
+          </a:effectRef>
+          <a:fontRef idx="minor">
+            <a:schemeClr val="lt1"/>
+          </a:fontRef>
+        </p:style>
+        <p:txBody>
+          <a:bodyPr rtlCol="0" anchor="ctr"/>
+          <a:lstStyle/>
+          <a:p>
+            <a:pPr algn="ctr"/>
+            <a:r>
+              <a:rPr kumimoji="1" lang="en-US" altLang="ko-KR" sz="800">
+                <a:solidFill>
+                  <a:schemeClr val="tx1"/>
+                </a:solidFill>
+              </a:rPr>
+              <a:t>10.0.0.42:80</a:t>
+            </a:r>
+            <a:endParaRPr kumimoji="1" lang="ko-KR" altLang="en-US" sz="800">
+              <a:solidFill>
+                <a:schemeClr val="tx1"/>
+              </a:solidFill>
+            </a:endParaRPr>
+          </a:p>
+        </p:txBody>
+      </p:sp>
+      <p:cxnSp>
+        <p:nvCxnSpPr>
+          <p:cNvPr id="244" name="직선 화살표 연결선 243">
+            <a:extLst>
+              <a:ext uri="{FF2B5EF4-FFF2-40B4-BE49-F238E27FC236}">
+                <a16:creationId xmlns:a16="http://schemas.microsoft.com/office/drawing/2014/main" id="{B60C4EFB-89B9-DCF4-0A42-C8916D046ACB}"/>
+              </a:ext>
+            </a:extLst>
+          </p:cNvPr>
+          <p:cNvCxnSpPr>
+            <a:cxnSpLocks/>
+            <a:stCxn id="230" idx="3"/>
+            <a:endCxn id="238" idx="1"/>
+          </p:cNvCxnSpPr>
+          <p:nvPr/>
+        </p:nvCxnSpPr>
+        <p:spPr>
+          <a:xfrm flipV="1">
+            <a:off x="7125055" y="3749773"/>
+            <a:ext cx="441565" cy="175060"/>
+          </a:xfrm>
+          <a:prstGeom prst="straightConnector1">
+            <a:avLst/>
+          </a:prstGeom>
+          <a:ln w="12700">
+            <a:solidFill>
+              <a:schemeClr val="accent3"/>
+            </a:solidFill>
+            <a:tailEnd type="triangle"/>
+          </a:ln>
+        </p:spPr>
+        <p:style>
+          <a:lnRef idx="1">
+            <a:schemeClr val="accent1"/>
+          </a:lnRef>
+          <a:fillRef idx="0">
+            <a:schemeClr val="accent1"/>
+          </a:fillRef>
+          <a:effectRef idx="0">
+            <a:schemeClr val="accent1"/>
+          </a:effectRef>
+          <a:fontRef idx="minor">
+            <a:schemeClr val="tx1"/>
+          </a:fontRef>
+        </p:style>
+      </p:cxnSp>
+      <p:cxnSp>
+        <p:nvCxnSpPr>
+          <p:cNvPr id="247" name="직선 화살표 연결선 246">
+            <a:extLst>
+              <a:ext uri="{FF2B5EF4-FFF2-40B4-BE49-F238E27FC236}">
+                <a16:creationId xmlns:a16="http://schemas.microsoft.com/office/drawing/2014/main" id="{82F96D60-B67F-FE26-585D-7AF32F5B131B}"/>
+              </a:ext>
+            </a:extLst>
+          </p:cNvPr>
+          <p:cNvCxnSpPr>
+            <a:cxnSpLocks/>
+            <a:stCxn id="230" idx="3"/>
+            <a:endCxn id="243" idx="1"/>
+          </p:cNvCxnSpPr>
+          <p:nvPr/>
+        </p:nvCxnSpPr>
+        <p:spPr>
+          <a:xfrm>
+            <a:off x="7125055" y="3924833"/>
+            <a:ext cx="441565" cy="296249"/>
+          </a:xfrm>
+          <a:prstGeom prst="straightConnector1">
+            <a:avLst/>
+          </a:prstGeom>
+          <a:ln w="12700">
+            <a:solidFill>
+              <a:schemeClr val="accent3"/>
+            </a:solidFill>
+            <a:tailEnd type="triangle"/>
+          </a:ln>
+        </p:spPr>
+        <p:style>
+          <a:lnRef idx="1">
+            <a:schemeClr val="accent1"/>
+          </a:lnRef>
+          <a:fillRef idx="0">
+            <a:schemeClr val="accent1"/>
+          </a:fillRef>
+          <a:effectRef idx="0">
+            <a:schemeClr val="accent1"/>
+          </a:effectRef>
+          <a:fontRef idx="minor">
+            <a:schemeClr val="tx1"/>
+          </a:fontRef>
+        </p:style>
+      </p:cxnSp>
+      <p:sp>
+        <p:nvSpPr>
+          <p:cNvPr id="282" name="모서리가 둥근 직사각형 281">
+            <a:extLst>
+              <a:ext uri="{FF2B5EF4-FFF2-40B4-BE49-F238E27FC236}">
+                <a16:creationId xmlns:a16="http://schemas.microsoft.com/office/drawing/2014/main" id="{1D7102EC-912F-B772-2565-71B365C01CD6}"/>
+              </a:ext>
+            </a:extLst>
+          </p:cNvPr>
+          <p:cNvSpPr/>
+          <p:nvPr/>
+        </p:nvSpPr>
+        <p:spPr>
+          <a:xfrm>
+            <a:off x="7566620" y="4540046"/>
+            <a:ext cx="1309186" cy="285430"/>
+          </a:xfrm>
+          <a:prstGeom prst="roundRect">
+            <a:avLst>
+              <a:gd name="adj" fmla="val 12191"/>
+            </a:avLst>
+          </a:prstGeom>
+          <a:solidFill>
+            <a:schemeClr val="bg1">
+              <a:lumMod val="95000"/>
+            </a:schemeClr>
+          </a:solidFill>
+          <a:ln w="12700"/>
+        </p:spPr>
+        <p:style>
+          <a:lnRef idx="2">
+            <a:schemeClr val="accent1">
+              <a:shade val="15000"/>
+            </a:schemeClr>
+          </a:lnRef>
+          <a:fillRef idx="1">
+            <a:schemeClr val="accent1"/>
+          </a:fillRef>
+          <a:effectRef idx="0">
+            <a:schemeClr val="accent1"/>
+          </a:effectRef>
+          <a:fontRef idx="minor">
+            <a:schemeClr val="lt1"/>
+          </a:fontRef>
+        </p:style>
+        <p:txBody>
+          <a:bodyPr rtlCol="0" anchor="ctr"/>
+          <a:lstStyle/>
+          <a:p>
+            <a:pPr algn="ctr"/>
+            <a:r>
+              <a:rPr kumimoji="1" lang="en-US" altLang="ko-KR" sz="800">
+                <a:solidFill>
+                  <a:schemeClr val="tx1"/>
+                </a:solidFill>
+              </a:rPr>
+              <a:t>10.0.0.51:9092</a:t>
+            </a:r>
+            <a:endParaRPr kumimoji="1" lang="ko-KR" altLang="en-US" sz="800">
+              <a:solidFill>
+                <a:schemeClr val="tx1"/>
+              </a:solidFill>
+            </a:endParaRPr>
+          </a:p>
+        </p:txBody>
+      </p:sp>
+      <p:sp>
+        <p:nvSpPr>
+          <p:cNvPr id="290" name="모서리가 둥근 직사각형 289">
+            <a:extLst>
+              <a:ext uri="{FF2B5EF4-FFF2-40B4-BE49-F238E27FC236}">
+                <a16:creationId xmlns:a16="http://schemas.microsoft.com/office/drawing/2014/main" id="{44F8EDF0-1027-0AC0-AB0D-3E7CD53B9AE2}"/>
+              </a:ext>
+            </a:extLst>
+          </p:cNvPr>
+          <p:cNvSpPr/>
+          <p:nvPr/>
+        </p:nvSpPr>
+        <p:spPr>
+          <a:xfrm>
+            <a:off x="2022541" y="3687819"/>
+            <a:ext cx="1170612" cy="281472"/>
+          </a:xfrm>
+          <a:prstGeom prst="roundRect">
+            <a:avLst>
+              <a:gd name="adj" fmla="val 15966"/>
+            </a:avLst>
+          </a:prstGeom>
+          <a:solidFill>
+            <a:schemeClr val="bg1">
+              <a:lumMod val="95000"/>
+            </a:schemeClr>
+          </a:solidFill>
+          <a:ln w="12700"/>
+        </p:spPr>
+        <p:style>
+          <a:lnRef idx="2">
+            <a:schemeClr val="accent1">
+              <a:shade val="15000"/>
+            </a:schemeClr>
+          </a:lnRef>
+          <a:fillRef idx="1">
+            <a:schemeClr val="accent1"/>
+          </a:fillRef>
+          <a:effectRef idx="0">
+            <a:schemeClr val="accent1"/>
+          </a:effectRef>
+          <a:fontRef idx="minor">
+            <a:schemeClr val="lt1"/>
+          </a:fontRef>
+        </p:style>
+        <p:txBody>
+          <a:bodyPr rtlCol="0" anchor="ctr"/>
+          <a:lstStyle/>
+          <a:p>
+            <a:r>
+              <a:rPr kumimoji="1" lang="en-US" altLang="ko-KR" sz="800">
+                <a:solidFill>
+                  <a:schemeClr val="tx1"/>
+                </a:solidFill>
+              </a:rPr>
+              <a:t>SNI: web.com</a:t>
+            </a:r>
+          </a:p>
+          <a:p>
+            <a:r>
+              <a:rPr kumimoji="1" lang="en-US" altLang="ko-KR" sz="800">
+                <a:solidFill>
+                  <a:schemeClr val="tx1"/>
+                </a:solidFill>
+              </a:rPr>
+              <a:t>SDS: web-cert</a:t>
+            </a:r>
+            <a:endParaRPr kumimoji="1" lang="ko-KR" altLang="en-US" sz="800">
+              <a:solidFill>
+                <a:schemeClr val="tx1"/>
+              </a:solidFill>
+            </a:endParaRPr>
+          </a:p>
+        </p:txBody>
+      </p:sp>
+      <p:sp>
+        <p:nvSpPr>
+          <p:cNvPr id="291" name="모서리가 둥근 직사각형 290">
+            <a:extLst>
+              <a:ext uri="{FF2B5EF4-FFF2-40B4-BE49-F238E27FC236}">
+                <a16:creationId xmlns:a16="http://schemas.microsoft.com/office/drawing/2014/main" id="{88F0CEB5-1157-2524-1A3B-5D0FD6EA4A64}"/>
+              </a:ext>
+            </a:extLst>
+          </p:cNvPr>
+          <p:cNvSpPr/>
+          <p:nvPr/>
+        </p:nvSpPr>
+        <p:spPr>
+          <a:xfrm>
+            <a:off x="2022541" y="3966467"/>
+            <a:ext cx="1170612" cy="281472"/>
+          </a:xfrm>
+          <a:prstGeom prst="roundRect">
+            <a:avLst>
+              <a:gd name="adj" fmla="val 15966"/>
+            </a:avLst>
+          </a:prstGeom>
+          <a:solidFill>
+            <a:schemeClr val="bg1">
+              <a:lumMod val="95000"/>
+            </a:schemeClr>
+          </a:solidFill>
+          <a:ln w="12700"/>
+        </p:spPr>
+        <p:style>
+          <a:lnRef idx="2">
+            <a:schemeClr val="accent1">
+              <a:shade val="15000"/>
+            </a:schemeClr>
+          </a:lnRef>
+          <a:fillRef idx="1">
+            <a:schemeClr val="accent1"/>
+          </a:fillRef>
+          <a:effectRef idx="0">
+            <a:schemeClr val="accent1"/>
+          </a:effectRef>
+          <a:fontRef idx="minor">
+            <a:schemeClr val="lt1"/>
+          </a:fontRef>
+        </p:style>
+        <p:txBody>
+          <a:bodyPr rtlCol="0" anchor="ctr"/>
+          <a:lstStyle/>
+          <a:p>
+            <a:r>
+              <a:rPr kumimoji="1" lang="en-US" altLang="ko-KR" sz="800">
+                <a:solidFill>
+                  <a:schemeClr val="tx1"/>
+                </a:solidFill>
+              </a:rPr>
+              <a:t>SNI: kafka.com</a:t>
+            </a:r>
+          </a:p>
+          <a:p>
+            <a:r>
+              <a:rPr kumimoji="1" lang="en-US" altLang="ko-KR" sz="800">
+                <a:solidFill>
+                  <a:schemeClr val="tx1"/>
+                </a:solidFill>
+              </a:rPr>
+              <a:t>SDS: kafka-cert</a:t>
+            </a:r>
+            <a:endParaRPr kumimoji="1" lang="ko-KR" altLang="en-US" sz="800">
+              <a:solidFill>
+                <a:schemeClr val="tx1"/>
+              </a:solidFill>
+            </a:endParaRPr>
+          </a:p>
+        </p:txBody>
+      </p:sp>
+      <p:cxnSp>
+        <p:nvCxnSpPr>
+          <p:cNvPr id="293" name="직선 화살표 연결선 292">
+            <a:extLst>
+              <a:ext uri="{FF2B5EF4-FFF2-40B4-BE49-F238E27FC236}">
+                <a16:creationId xmlns:a16="http://schemas.microsoft.com/office/drawing/2014/main" id="{5448CD22-E0FE-3703-6C3C-4A1303192664}"/>
+              </a:ext>
+            </a:extLst>
+          </p:cNvPr>
+          <p:cNvCxnSpPr>
+            <a:cxnSpLocks/>
+            <a:stCxn id="290" idx="3"/>
+            <a:endCxn id="223" idx="1"/>
+          </p:cNvCxnSpPr>
+          <p:nvPr/>
+        </p:nvCxnSpPr>
+        <p:spPr>
+          <a:xfrm flipV="1">
+            <a:off x="3193153" y="3825731"/>
+            <a:ext cx="581204" cy="2824"/>
+          </a:xfrm>
+          <a:prstGeom prst="straightConnector1">
+            <a:avLst/>
+          </a:prstGeom>
+          <a:ln w="12700">
+            <a:solidFill>
+              <a:schemeClr val="accent3"/>
+            </a:solidFill>
+            <a:tailEnd type="triangle"/>
+          </a:ln>
+        </p:spPr>
+        <p:style>
+          <a:lnRef idx="1">
+            <a:schemeClr val="accent1"/>
+          </a:lnRef>
+          <a:fillRef idx="0">
+            <a:schemeClr val="accent1"/>
+          </a:fillRef>
+          <a:effectRef idx="0">
+            <a:schemeClr val="accent1"/>
+          </a:effectRef>
+          <a:fontRef idx="minor">
+            <a:schemeClr val="tx1"/>
+          </a:fontRef>
+        </p:style>
+      </p:cxnSp>
+      <p:cxnSp>
+        <p:nvCxnSpPr>
+          <p:cNvPr id="295" name="직선 화살표 연결선 294">
+            <a:extLst>
+              <a:ext uri="{FF2B5EF4-FFF2-40B4-BE49-F238E27FC236}">
+                <a16:creationId xmlns:a16="http://schemas.microsoft.com/office/drawing/2014/main" id="{E33CA114-7DD4-8D11-CDFD-41C25B28C303}"/>
+              </a:ext>
+            </a:extLst>
+          </p:cNvPr>
+          <p:cNvCxnSpPr>
+            <a:cxnSpLocks/>
+            <a:stCxn id="199" idx="3"/>
+            <a:endCxn id="290" idx="1"/>
+          </p:cNvCxnSpPr>
+          <p:nvPr/>
+        </p:nvCxnSpPr>
+        <p:spPr>
+          <a:xfrm>
+            <a:off x="1520329" y="3646998"/>
+            <a:ext cx="502212" cy="181557"/>
+          </a:xfrm>
+          <a:prstGeom prst="straightConnector1">
+            <a:avLst/>
+          </a:prstGeom>
+          <a:ln w="12700">
+            <a:solidFill>
+              <a:schemeClr val="accent3"/>
+            </a:solidFill>
+            <a:tailEnd type="triangle"/>
+          </a:ln>
+        </p:spPr>
+        <p:style>
+          <a:lnRef idx="1">
+            <a:schemeClr val="accent1"/>
+          </a:lnRef>
+          <a:fillRef idx="0">
+            <a:schemeClr val="accent1"/>
+          </a:fillRef>
+          <a:effectRef idx="0">
+            <a:schemeClr val="accent1"/>
+          </a:effectRef>
+          <a:fontRef idx="minor">
+            <a:schemeClr val="tx1"/>
+          </a:fontRef>
+        </p:style>
+      </p:cxnSp>
+      <p:sp>
+        <p:nvSpPr>
+          <p:cNvPr id="300" name="모서리가 둥근 직사각형 299">
+            <a:extLst>
+              <a:ext uri="{FF2B5EF4-FFF2-40B4-BE49-F238E27FC236}">
+                <a16:creationId xmlns:a16="http://schemas.microsoft.com/office/drawing/2014/main" id="{929D4531-9621-9C1E-4C37-725ED764C180}"/>
+              </a:ext>
+            </a:extLst>
+          </p:cNvPr>
+          <p:cNvSpPr/>
+          <p:nvPr/>
+        </p:nvSpPr>
+        <p:spPr>
+          <a:xfrm>
+            <a:off x="202115" y="4072957"/>
+            <a:ext cx="1318214" cy="427639"/>
+          </a:xfrm>
+          <a:prstGeom prst="roundRect">
+            <a:avLst>
+              <a:gd name="adj" fmla="val 12191"/>
+            </a:avLst>
+          </a:prstGeom>
+          <a:solidFill>
+            <a:schemeClr val="bg1">
+              <a:lumMod val="95000"/>
+            </a:schemeClr>
+          </a:solidFill>
+          <a:ln w="12700"/>
+        </p:spPr>
+        <p:style>
+          <a:lnRef idx="2">
+            <a:schemeClr val="accent1">
+              <a:shade val="15000"/>
+            </a:schemeClr>
+          </a:lnRef>
+          <a:fillRef idx="1">
+            <a:schemeClr val="accent1"/>
+          </a:fillRef>
+          <a:effectRef idx="0">
+            <a:schemeClr val="accent1"/>
+          </a:effectRef>
+          <a:fontRef idx="minor">
+            <a:schemeClr val="lt1"/>
+          </a:fontRef>
+        </p:style>
+        <p:txBody>
+          <a:bodyPr rtlCol="0" anchor="ctr"/>
+          <a:lstStyle/>
+          <a:p>
+            <a:r>
+              <a:rPr kumimoji="1" lang="en-US" altLang="ko-KR" sz="800">
+                <a:solidFill>
+                  <a:schemeClr val="tx1"/>
+                </a:solidFill>
+              </a:rPr>
+              <a:t>Server Port: 443</a:t>
+            </a:r>
+          </a:p>
+          <a:p>
+            <a:r>
+              <a:rPr kumimoji="1" lang="en-US" altLang="ko-KR" sz="800">
+                <a:solidFill>
+                  <a:schemeClr val="tx1"/>
+                </a:solidFill>
+              </a:rPr>
+              <a:t>SNI: kafka.com</a:t>
+            </a:r>
+            <a:endParaRPr kumimoji="1" lang="ko-KR" altLang="en-US" sz="800">
+              <a:solidFill>
+                <a:schemeClr val="tx1"/>
+              </a:solidFill>
+            </a:endParaRPr>
+          </a:p>
+        </p:txBody>
+      </p:sp>
+      <p:cxnSp>
+        <p:nvCxnSpPr>
+          <p:cNvPr id="301" name="직선 화살표 연결선 300">
+            <a:extLst>
+              <a:ext uri="{FF2B5EF4-FFF2-40B4-BE49-F238E27FC236}">
+                <a16:creationId xmlns:a16="http://schemas.microsoft.com/office/drawing/2014/main" id="{B9F25892-6473-615F-D135-620D93516CD8}"/>
+              </a:ext>
+            </a:extLst>
+          </p:cNvPr>
+          <p:cNvCxnSpPr>
+            <a:cxnSpLocks/>
+            <a:stCxn id="300" idx="3"/>
+            <a:endCxn id="291" idx="1"/>
+          </p:cNvCxnSpPr>
+          <p:nvPr/>
+        </p:nvCxnSpPr>
+        <p:spPr>
+          <a:xfrm flipV="1">
+            <a:off x="1520329" y="4107203"/>
+            <a:ext cx="502212" cy="179574"/>
+          </a:xfrm>
+          <a:prstGeom prst="straightConnector1">
+            <a:avLst/>
+          </a:prstGeom>
+          <a:ln w="12700">
+            <a:solidFill>
+              <a:schemeClr val="accent6"/>
+            </a:solidFill>
+            <a:tailEnd type="triangle"/>
+          </a:ln>
+        </p:spPr>
+        <p:style>
+          <a:lnRef idx="1">
+            <a:schemeClr val="accent1"/>
+          </a:lnRef>
+          <a:fillRef idx="0">
+            <a:schemeClr val="accent1"/>
+          </a:fillRef>
+          <a:effectRef idx="0">
+            <a:schemeClr val="accent1"/>
+          </a:effectRef>
+          <a:fontRef idx="minor">
+            <a:schemeClr val="tx1"/>
+          </a:fontRef>
+        </p:style>
+      </p:cxnSp>
+      <p:cxnSp>
+        <p:nvCxnSpPr>
+          <p:cNvPr id="312" name="직선 화살표 연결선 311">
+            <a:extLst>
+              <a:ext uri="{FF2B5EF4-FFF2-40B4-BE49-F238E27FC236}">
+                <a16:creationId xmlns:a16="http://schemas.microsoft.com/office/drawing/2014/main" id="{FD08B47F-5F19-4440-2BC3-6C6832426C08}"/>
+              </a:ext>
+            </a:extLst>
+          </p:cNvPr>
+          <p:cNvCxnSpPr>
+            <a:cxnSpLocks/>
+            <a:stCxn id="291" idx="3"/>
+            <a:endCxn id="235" idx="1"/>
+          </p:cNvCxnSpPr>
+          <p:nvPr/>
+        </p:nvCxnSpPr>
+        <p:spPr>
+          <a:xfrm>
+            <a:off x="3193153" y="4107203"/>
+            <a:ext cx="2622716" cy="470414"/>
+          </a:xfrm>
+          <a:prstGeom prst="straightConnector1">
+            <a:avLst/>
+          </a:prstGeom>
+          <a:ln w="12700">
+            <a:solidFill>
+              <a:schemeClr val="accent6"/>
+            </a:solidFill>
+            <a:tailEnd type="triangle"/>
+          </a:ln>
+        </p:spPr>
+        <p:style>
+          <a:lnRef idx="1">
+            <a:schemeClr val="accent1"/>
+          </a:lnRef>
+          <a:fillRef idx="0">
+            <a:schemeClr val="accent1"/>
+          </a:fillRef>
+          <a:effectRef idx="0">
+            <a:schemeClr val="accent1"/>
+          </a:effectRef>
+          <a:fontRef idx="minor">
+            <a:schemeClr val="tx1"/>
+          </a:fontRef>
+        </p:style>
+      </p:cxnSp>
+      <p:cxnSp>
+        <p:nvCxnSpPr>
+          <p:cNvPr id="315" name="직선 화살표 연결선 314">
+            <a:extLst>
+              <a:ext uri="{FF2B5EF4-FFF2-40B4-BE49-F238E27FC236}">
+                <a16:creationId xmlns:a16="http://schemas.microsoft.com/office/drawing/2014/main" id="{60D35C2B-B9DA-46F4-F3A5-994049AA4A49}"/>
+              </a:ext>
+            </a:extLst>
+          </p:cNvPr>
+          <p:cNvCxnSpPr>
+            <a:cxnSpLocks/>
+            <a:stCxn id="235" idx="3"/>
+            <a:endCxn id="282" idx="1"/>
+          </p:cNvCxnSpPr>
+          <p:nvPr/>
+        </p:nvCxnSpPr>
+        <p:spPr>
+          <a:xfrm>
+            <a:off x="7125055" y="4577617"/>
+            <a:ext cx="441565" cy="105144"/>
+          </a:xfrm>
+          <a:prstGeom prst="straightConnector1">
+            <a:avLst/>
+          </a:prstGeom>
+          <a:ln w="12700">
+            <a:solidFill>
+              <a:schemeClr val="accent6"/>
+            </a:solidFill>
+            <a:tailEnd type="triangle"/>
+          </a:ln>
+        </p:spPr>
+        <p:style>
+          <a:lnRef idx="1">
+            <a:schemeClr val="accent1"/>
+          </a:lnRef>
+          <a:fillRef idx="0">
+            <a:schemeClr val="accent1"/>
+          </a:fillRef>
+          <a:effectRef idx="0">
+            <a:schemeClr val="accent1"/>
+          </a:effectRef>
+          <a:fontRef idx="minor">
+            <a:schemeClr val="tx1"/>
+          </a:fontRef>
+        </p:style>
+      </p:cxnSp>
+      <p:sp>
+        <p:nvSpPr>
+          <p:cNvPr id="321" name="모서리가 둥근 직사각형 320">
+            <a:extLst>
+              <a:ext uri="{FF2B5EF4-FFF2-40B4-BE49-F238E27FC236}">
+                <a16:creationId xmlns:a16="http://schemas.microsoft.com/office/drawing/2014/main" id="{87E57698-01AC-BC72-9D59-68A250E7DBF8}"/>
+              </a:ext>
+            </a:extLst>
+          </p:cNvPr>
+          <p:cNvSpPr/>
+          <p:nvPr/>
+        </p:nvSpPr>
+        <p:spPr>
+          <a:xfrm>
+            <a:off x="4427984" y="339502"/>
+            <a:ext cx="4521965" cy="636879"/>
+          </a:xfrm>
+          <a:prstGeom prst="roundRect">
+            <a:avLst>
+              <a:gd name="adj" fmla="val 7121"/>
+            </a:avLst>
+          </a:prstGeom>
+          <a:solidFill>
+            <a:schemeClr val="bg1"/>
+          </a:solidFill>
+          <a:ln w="12700">
+            <a:prstDash val="dash"/>
+          </a:ln>
+        </p:spPr>
+        <p:style>
+          <a:lnRef idx="2">
+            <a:schemeClr val="accent1">
+              <a:shade val="15000"/>
+            </a:schemeClr>
+          </a:lnRef>
+          <a:fillRef idx="1">
+            <a:schemeClr val="accent1"/>
+          </a:fillRef>
+          <a:effectRef idx="0">
+            <a:schemeClr val="accent1"/>
+          </a:effectRef>
+          <a:fontRef idx="minor">
+            <a:schemeClr val="lt1"/>
+          </a:fontRef>
+        </p:style>
+        <p:txBody>
+          <a:bodyPr rtlCol="0" anchor="t"/>
+          <a:lstStyle/>
+          <a:p>
+            <a:pPr algn="ctr"/>
+            <a:r>
+              <a:rPr kumimoji="1" lang="en-US" altLang="ko-KR" sz="900" b="1">
+                <a:solidFill>
+                  <a:schemeClr val="tx1"/>
+                </a:solidFill>
+              </a:rPr>
+              <a:t>Secrets</a:t>
+            </a:r>
+            <a:endParaRPr kumimoji="1" lang="ko-KR" altLang="en-US" sz="900" b="1">
+              <a:solidFill>
+                <a:schemeClr val="tx1"/>
+              </a:solidFill>
+            </a:endParaRPr>
+          </a:p>
+        </p:txBody>
+      </p:sp>
+      <p:sp>
+        <p:nvSpPr>
+          <p:cNvPr id="327" name="모서리가 둥근 직사각형 326">
+            <a:extLst>
+              <a:ext uri="{FF2B5EF4-FFF2-40B4-BE49-F238E27FC236}">
+                <a16:creationId xmlns:a16="http://schemas.microsoft.com/office/drawing/2014/main" id="{16E63CE4-37DC-01E8-C8E8-7643607F05AD}"/>
+              </a:ext>
+            </a:extLst>
+          </p:cNvPr>
+          <p:cNvSpPr/>
+          <p:nvPr/>
+        </p:nvSpPr>
+        <p:spPr>
+          <a:xfrm>
+            <a:off x="4506682" y="612417"/>
+            <a:ext cx="1309186" cy="285430"/>
+          </a:xfrm>
+          <a:prstGeom prst="roundRect">
+            <a:avLst>
+              <a:gd name="adj" fmla="val 12191"/>
+            </a:avLst>
+          </a:prstGeom>
+          <a:solidFill>
+            <a:schemeClr val="bg1">
+              <a:lumMod val="95000"/>
+            </a:schemeClr>
+          </a:solidFill>
+          <a:ln w="12700"/>
+        </p:spPr>
+        <p:style>
+          <a:lnRef idx="2">
+            <a:schemeClr val="accent1">
+              <a:shade val="15000"/>
+            </a:schemeClr>
+          </a:lnRef>
+          <a:fillRef idx="1">
+            <a:schemeClr val="accent1"/>
+          </a:fillRef>
+          <a:effectRef idx="0">
+            <a:schemeClr val="accent1"/>
+          </a:effectRef>
+          <a:fontRef idx="minor">
+            <a:schemeClr val="lt1"/>
+          </a:fontRef>
+        </p:style>
+        <p:txBody>
+          <a:bodyPr rtlCol="0" anchor="ctr"/>
+          <a:lstStyle/>
+          <a:p>
+            <a:pPr algn="ctr"/>
+            <a:r>
+              <a:rPr kumimoji="1" lang="en-US" altLang="ko-KR" sz="800">
+                <a:solidFill>
+                  <a:schemeClr val="tx1"/>
+                </a:solidFill>
+              </a:rPr>
+              <a:t>internal-cert</a:t>
+            </a:r>
+            <a:endParaRPr kumimoji="1" lang="ko-KR" altLang="en-US" sz="800">
+              <a:solidFill>
+                <a:schemeClr val="tx1"/>
+              </a:solidFill>
+            </a:endParaRPr>
+          </a:p>
+        </p:txBody>
+      </p:sp>
+      <p:sp>
+        <p:nvSpPr>
+          <p:cNvPr id="328" name="모서리가 둥근 직사각형 327">
+            <a:extLst>
+              <a:ext uri="{FF2B5EF4-FFF2-40B4-BE49-F238E27FC236}">
+                <a16:creationId xmlns:a16="http://schemas.microsoft.com/office/drawing/2014/main" id="{1EB19045-7DFE-6F72-E180-9466AFD8A7F3}"/>
+              </a:ext>
+            </a:extLst>
+          </p:cNvPr>
+          <p:cNvSpPr/>
+          <p:nvPr/>
+        </p:nvSpPr>
+        <p:spPr>
+          <a:xfrm>
+            <a:off x="7566620" y="612417"/>
+            <a:ext cx="1309186" cy="285430"/>
+          </a:xfrm>
+          <a:prstGeom prst="roundRect">
+            <a:avLst>
+              <a:gd name="adj" fmla="val 12191"/>
+            </a:avLst>
+          </a:prstGeom>
+          <a:solidFill>
+            <a:schemeClr val="bg1">
+              <a:lumMod val="95000"/>
+            </a:schemeClr>
+          </a:solidFill>
+          <a:ln w="12700"/>
+        </p:spPr>
+        <p:style>
+          <a:lnRef idx="2">
+            <a:schemeClr val="accent1">
+              <a:shade val="15000"/>
+            </a:schemeClr>
+          </a:lnRef>
+          <a:fillRef idx="1">
+            <a:schemeClr val="accent1"/>
+          </a:fillRef>
+          <a:effectRef idx="0">
+            <a:schemeClr val="accent1"/>
+          </a:effectRef>
+          <a:fontRef idx="minor">
+            <a:schemeClr val="lt1"/>
+          </a:fontRef>
+        </p:style>
+        <p:txBody>
+          <a:bodyPr rtlCol="0" anchor="ctr"/>
+          <a:lstStyle/>
+          <a:p>
+            <a:pPr algn="ctr"/>
+            <a:r>
+              <a:rPr kumimoji="1" lang="en-US" altLang="ko-KR" sz="800">
+                <a:solidFill>
+                  <a:schemeClr val="tx1"/>
+                </a:solidFill>
+              </a:rPr>
+              <a:t>kafka-cert</a:t>
+            </a:r>
+            <a:endParaRPr kumimoji="1" lang="ko-KR" altLang="en-US" sz="800">
+              <a:solidFill>
+                <a:schemeClr val="tx1"/>
+              </a:solidFill>
+            </a:endParaRPr>
+          </a:p>
+        </p:txBody>
+      </p:sp>
+      <p:sp>
+        <p:nvSpPr>
+          <p:cNvPr id="329" name="모서리가 둥근 직사각형 328">
+            <a:extLst>
+              <a:ext uri="{FF2B5EF4-FFF2-40B4-BE49-F238E27FC236}">
+                <a16:creationId xmlns:a16="http://schemas.microsoft.com/office/drawing/2014/main" id="{671EBDA7-7F38-F386-D9D7-9FE713AE6FAC}"/>
+              </a:ext>
+            </a:extLst>
+          </p:cNvPr>
+          <p:cNvSpPr/>
+          <p:nvPr/>
+        </p:nvSpPr>
+        <p:spPr>
+          <a:xfrm>
+            <a:off x="6036651" y="612417"/>
+            <a:ext cx="1309186" cy="285430"/>
+          </a:xfrm>
+          <a:prstGeom prst="roundRect">
+            <a:avLst>
+              <a:gd name="adj" fmla="val 12191"/>
+            </a:avLst>
+          </a:prstGeom>
+          <a:solidFill>
+            <a:schemeClr val="bg1">
+              <a:lumMod val="95000"/>
+            </a:schemeClr>
+          </a:solidFill>
+          <a:ln w="12700"/>
+        </p:spPr>
+        <p:style>
+          <a:lnRef idx="2">
+            <a:schemeClr val="accent1">
+              <a:shade val="15000"/>
+            </a:schemeClr>
+          </a:lnRef>
+          <a:fillRef idx="1">
+            <a:schemeClr val="accent1"/>
+          </a:fillRef>
+          <a:effectRef idx="0">
+            <a:schemeClr val="accent1"/>
+          </a:effectRef>
+          <a:fontRef idx="minor">
+            <a:schemeClr val="lt1"/>
+          </a:fontRef>
+        </p:style>
+        <p:txBody>
+          <a:bodyPr rtlCol="0" anchor="ctr"/>
+          <a:lstStyle/>
+          <a:p>
+            <a:pPr algn="ctr"/>
+            <a:r>
+              <a:rPr kumimoji="1" lang="en-US" altLang="ko-KR" sz="800">
+                <a:solidFill>
+                  <a:schemeClr val="tx1"/>
+                </a:solidFill>
+              </a:rPr>
+              <a:t>web-cert</a:t>
+            </a:r>
+            <a:endParaRPr kumimoji="1" lang="ko-KR" altLang="en-US" sz="800">
+              <a:solidFill>
+                <a:schemeClr val="tx1"/>
+              </a:solidFill>
+            </a:endParaRPr>
+          </a:p>
+        </p:txBody>
+      </p:sp>
+      <p:cxnSp>
+        <p:nvCxnSpPr>
+          <p:cNvPr id="333" name="꺾인 연결선[E] 332">
+            <a:extLst>
+              <a:ext uri="{FF2B5EF4-FFF2-40B4-BE49-F238E27FC236}">
+                <a16:creationId xmlns:a16="http://schemas.microsoft.com/office/drawing/2014/main" id="{F1476E7D-E11D-A6E3-6521-E838DD93555C}"/>
+              </a:ext>
+            </a:extLst>
+          </p:cNvPr>
+          <p:cNvCxnSpPr>
+            <a:cxnSpLocks/>
+            <a:stCxn id="12" idx="2"/>
+            <a:endCxn id="18" idx="0"/>
+          </p:cNvCxnSpPr>
+          <p:nvPr/>
+        </p:nvCxnSpPr>
+        <p:spPr>
+          <a:xfrm rot="16200000" flipH="1">
+            <a:off x="3327806" y="245392"/>
+            <a:ext cx="500777" cy="1928179"/>
+          </a:xfrm>
+          <a:prstGeom prst="bentConnector3">
+            <a:avLst>
+              <a:gd name="adj1" fmla="val 50000"/>
+            </a:avLst>
+          </a:prstGeom>
+          <a:ln w="12700">
+            <a:solidFill>
+              <a:schemeClr val="tx1"/>
+            </a:solidFill>
+            <a:tailEnd type="triangle"/>
+          </a:ln>
+        </p:spPr>
+        <p:style>
+          <a:lnRef idx="1">
+            <a:schemeClr val="accent1"/>
+          </a:lnRef>
+          <a:fillRef idx="0">
+            <a:schemeClr val="accent1"/>
+          </a:fillRef>
+          <a:effectRef idx="0">
+            <a:schemeClr val="accent1"/>
+          </a:effectRef>
+          <a:fontRef idx="minor">
+            <a:schemeClr val="tx1"/>
+          </a:fontRef>
+        </p:style>
+      </p:cxnSp>
+      <p:cxnSp>
+        <p:nvCxnSpPr>
+          <p:cNvPr id="336" name="꺾인 연결선[E] 335">
+            <a:extLst>
+              <a:ext uri="{FF2B5EF4-FFF2-40B4-BE49-F238E27FC236}">
+                <a16:creationId xmlns:a16="http://schemas.microsoft.com/office/drawing/2014/main" id="{FBF67BBB-3061-34D3-B09B-C4477BDAB593}"/>
+              </a:ext>
+            </a:extLst>
+          </p:cNvPr>
+          <p:cNvCxnSpPr>
+            <a:cxnSpLocks/>
+            <a:stCxn id="12" idx="2"/>
+            <a:endCxn id="13" idx="0"/>
+          </p:cNvCxnSpPr>
+          <p:nvPr/>
+        </p:nvCxnSpPr>
+        <p:spPr>
+          <a:xfrm rot="16200000" flipH="1">
+            <a:off x="4291895" y="-718697"/>
+            <a:ext cx="500777" cy="3856357"/>
+          </a:xfrm>
+          <a:prstGeom prst="bentConnector3">
+            <a:avLst>
+              <a:gd name="adj1" fmla="val 50000"/>
+            </a:avLst>
+          </a:prstGeom>
+          <a:ln w="12700">
+            <a:solidFill>
+              <a:schemeClr val="tx1"/>
+            </a:solidFill>
+            <a:tailEnd type="triangle"/>
+          </a:ln>
+        </p:spPr>
+        <p:style>
+          <a:lnRef idx="1">
+            <a:schemeClr val="accent1"/>
+          </a:lnRef>
+          <a:fillRef idx="0">
+            <a:schemeClr val="accent1"/>
+          </a:fillRef>
+          <a:effectRef idx="0">
+            <a:schemeClr val="accent1"/>
+          </a:effectRef>
+          <a:fontRef idx="minor">
+            <a:schemeClr val="tx1"/>
+          </a:fontRef>
+        </p:style>
+      </p:cxnSp>
+      <p:cxnSp>
+        <p:nvCxnSpPr>
+          <p:cNvPr id="339" name="꺾인 연결선[E] 338">
+            <a:extLst>
+              <a:ext uri="{FF2B5EF4-FFF2-40B4-BE49-F238E27FC236}">
+                <a16:creationId xmlns:a16="http://schemas.microsoft.com/office/drawing/2014/main" id="{D1D55BE9-DDC2-CE78-74C0-3C8DA09EC956}"/>
+              </a:ext>
+            </a:extLst>
+          </p:cNvPr>
+          <p:cNvCxnSpPr>
+            <a:cxnSpLocks/>
+            <a:stCxn id="12" idx="2"/>
+            <a:endCxn id="32" idx="0"/>
+          </p:cNvCxnSpPr>
+          <p:nvPr/>
+        </p:nvCxnSpPr>
+        <p:spPr>
+          <a:xfrm rot="16200000" flipH="1">
+            <a:off x="5167272" y="-1594073"/>
+            <a:ext cx="500777" cy="5607110"/>
+          </a:xfrm>
+          <a:prstGeom prst="bentConnector3">
+            <a:avLst>
+              <a:gd name="adj1" fmla="val 50000"/>
+            </a:avLst>
+          </a:prstGeom>
+          <a:ln w="12700">
+            <a:solidFill>
+              <a:schemeClr val="tx1"/>
+            </a:solidFill>
+            <a:tailEnd type="triangle"/>
+          </a:ln>
+        </p:spPr>
+        <p:style>
+          <a:lnRef idx="1">
+            <a:schemeClr val="accent1"/>
+          </a:lnRef>
+          <a:fillRef idx="0">
+            <a:schemeClr val="accent1"/>
+          </a:fillRef>
+          <a:effectRef idx="0">
+            <a:schemeClr val="accent1"/>
+          </a:effectRef>
+          <a:fontRef idx="minor">
+            <a:schemeClr val="tx1"/>
+          </a:fontRef>
+        </p:style>
+      </p:cxnSp>
+      <p:cxnSp>
+        <p:nvCxnSpPr>
+          <p:cNvPr id="342" name="직선 화살표 연결선 341">
+            <a:extLst>
+              <a:ext uri="{FF2B5EF4-FFF2-40B4-BE49-F238E27FC236}">
+                <a16:creationId xmlns:a16="http://schemas.microsoft.com/office/drawing/2014/main" id="{0CCD2E20-8365-8E8C-CD5E-8F608DDF55EC}"/>
+              </a:ext>
+            </a:extLst>
+          </p:cNvPr>
+          <p:cNvCxnSpPr>
+            <a:cxnSpLocks/>
+            <a:stCxn id="12" idx="2"/>
+            <a:endCxn id="8" idx="0"/>
+          </p:cNvCxnSpPr>
+          <p:nvPr/>
+        </p:nvCxnSpPr>
+        <p:spPr>
+          <a:xfrm>
+            <a:off x="2614105" y="959094"/>
+            <a:ext cx="1" cy="500777"/>
+          </a:xfrm>
+          <a:prstGeom prst="straightConnector1">
+            <a:avLst/>
+          </a:prstGeom>
+          <a:ln w="12700">
+            <a:solidFill>
+              <a:schemeClr val="tx1"/>
+            </a:solidFill>
+            <a:tailEnd type="triangle"/>
+          </a:ln>
+        </p:spPr>
+        <p:style>
+          <a:lnRef idx="1">
+            <a:schemeClr val="accent1"/>
+          </a:lnRef>
+          <a:fillRef idx="0">
+            <a:schemeClr val="accent1"/>
+          </a:fillRef>
+          <a:effectRef idx="0">
+            <a:schemeClr val="accent1"/>
+          </a:effectRef>
+          <a:fontRef idx="minor">
+            <a:schemeClr val="tx1"/>
+          </a:fontRef>
+        </p:style>
+      </p:cxnSp>
+      <p:cxnSp>
+        <p:nvCxnSpPr>
+          <p:cNvPr id="345" name="꺾인 연결선[E] 344">
+            <a:extLst>
+              <a:ext uri="{FF2B5EF4-FFF2-40B4-BE49-F238E27FC236}">
+                <a16:creationId xmlns:a16="http://schemas.microsoft.com/office/drawing/2014/main" id="{E0C45F33-A248-EAA0-38F7-1A91424C0EED}"/>
+              </a:ext>
+            </a:extLst>
+          </p:cNvPr>
+          <p:cNvCxnSpPr>
+            <a:cxnSpLocks/>
+            <a:stCxn id="12" idx="2"/>
+            <a:endCxn id="321" idx="2"/>
+          </p:cNvCxnSpPr>
+          <p:nvPr/>
+        </p:nvCxnSpPr>
+        <p:spPr>
+          <a:xfrm rot="16200000" flipH="1">
+            <a:off x="4642893" y="-1069694"/>
+            <a:ext cx="17287" cy="4074862"/>
+          </a:xfrm>
+          <a:prstGeom prst="bentConnector3">
+            <a:avLst>
+              <a:gd name="adj1" fmla="val 1422381"/>
+            </a:avLst>
+          </a:prstGeom>
+          <a:ln w="12700">
+            <a:solidFill>
+              <a:schemeClr val="tx1"/>
+            </a:solidFill>
+            <a:tailEnd type="triangle"/>
+          </a:ln>
+        </p:spPr>
+        <p:style>
+          <a:lnRef idx="1">
+            <a:schemeClr val="accent1"/>
+          </a:lnRef>
+          <a:fillRef idx="0">
+            <a:schemeClr val="accent1"/>
+          </a:fillRef>
+          <a:effectRef idx="0">
+            <a:schemeClr val="accent1"/>
+          </a:effectRef>
+          <a:fontRef idx="minor">
+            <a:schemeClr val="tx1"/>
+          </a:fontRef>
+        </p:style>
+      </p:cxnSp>
+      <p:sp>
+        <p:nvSpPr>
+          <p:cNvPr id="357" name="모서리가 둥근 직사각형 356">
+            <a:extLst>
+              <a:ext uri="{FF2B5EF4-FFF2-40B4-BE49-F238E27FC236}">
+                <a16:creationId xmlns:a16="http://schemas.microsoft.com/office/drawing/2014/main" id="{C14C37B7-CB30-14B1-CA86-D9EEE9FD2852}"/>
+              </a:ext>
+            </a:extLst>
+          </p:cNvPr>
+          <p:cNvSpPr/>
+          <p:nvPr/>
+        </p:nvSpPr>
+        <p:spPr>
+          <a:xfrm>
+            <a:off x="2608929" y="957216"/>
+            <a:ext cx="1164463" cy="185590"/>
+          </a:xfrm>
+          <a:prstGeom prst="roundRect">
+            <a:avLst>
+              <a:gd name="adj" fmla="val 12191"/>
+            </a:avLst>
+          </a:prstGeom>
+          <a:noFill/>
+          <a:ln w="12700">
+            <a:noFill/>
+          </a:ln>
+        </p:spPr>
+        <p:style>
+          <a:lnRef idx="2">
+            <a:schemeClr val="accent1">
+              <a:shade val="15000"/>
+            </a:schemeClr>
+          </a:lnRef>
+          <a:fillRef idx="1">
+            <a:schemeClr val="accent1"/>
+          </a:fillRef>
+          <a:effectRef idx="0">
+            <a:schemeClr val="accent1"/>
+          </a:effectRef>
+          <a:fontRef idx="minor">
+            <a:schemeClr val="lt1"/>
+          </a:fontRef>
+        </p:style>
+        <p:txBody>
+          <a:bodyPr rtlCol="0" anchor="ctr"/>
+          <a:lstStyle/>
+          <a:p>
+            <a:r>
+              <a:rPr kumimoji="1" lang="en-US" altLang="ko-KR" sz="800" i="1">
+                <a:solidFill>
+                  <a:schemeClr val="tx1"/>
+                </a:solidFill>
+              </a:rPr>
+              <a:t>1 Stream with </a:t>
+            </a:r>
+            <a:r>
+              <a:rPr kumimoji="1" lang="en-US" altLang="ko-KR" sz="800" b="1" i="1" u="sng">
+                <a:solidFill>
+                  <a:schemeClr val="tx1"/>
+                </a:solidFill>
+              </a:rPr>
+              <a:t>ADS </a:t>
+            </a:r>
+            <a:endParaRPr kumimoji="1" lang="ko-KR" altLang="en-US" sz="800" b="1" i="1" u="sng">
+              <a:solidFill>
+                <a:schemeClr val="tx1"/>
+              </a:solidFill>
+            </a:endParaRPr>
+          </a:p>
+        </p:txBody>
+      </p:sp>
+      <p:sp>
+        <p:nvSpPr>
+          <p:cNvPr id="358" name="모서리가 둥근 직사각형 357">
+            <a:extLst>
+              <a:ext uri="{FF2B5EF4-FFF2-40B4-BE49-F238E27FC236}">
+                <a16:creationId xmlns:a16="http://schemas.microsoft.com/office/drawing/2014/main" id="{B822DA01-ADB3-C48E-9A61-99087BFD45FC}"/>
+              </a:ext>
+            </a:extLst>
+          </p:cNvPr>
+          <p:cNvSpPr/>
+          <p:nvPr/>
+        </p:nvSpPr>
+        <p:spPr>
+          <a:xfrm>
+            <a:off x="2608929" y="1272082"/>
+            <a:ext cx="1164463" cy="185590"/>
+          </a:xfrm>
+          <a:prstGeom prst="roundRect">
+            <a:avLst>
+              <a:gd name="adj" fmla="val 12191"/>
+            </a:avLst>
+          </a:prstGeom>
+          <a:noFill/>
+          <a:ln w="12700">
+            <a:noFill/>
+          </a:ln>
+        </p:spPr>
+        <p:style>
+          <a:lnRef idx="2">
+            <a:schemeClr val="accent1">
+              <a:shade val="15000"/>
+            </a:schemeClr>
+          </a:lnRef>
+          <a:fillRef idx="1">
+            <a:schemeClr val="accent1"/>
+          </a:fillRef>
+          <a:effectRef idx="0">
+            <a:schemeClr val="accent1"/>
+          </a:effectRef>
+          <a:fontRef idx="minor">
+            <a:schemeClr val="lt1"/>
+          </a:fontRef>
+        </p:style>
+        <p:txBody>
+          <a:bodyPr rtlCol="0" anchor="ctr"/>
+          <a:lstStyle/>
+          <a:p>
+            <a:r>
+              <a:rPr kumimoji="1" lang="en-US" altLang="ko-KR" sz="800" b="1" i="1" u="sng">
+                <a:solidFill>
+                  <a:schemeClr val="tx1"/>
+                </a:solidFill>
+              </a:rPr>
+              <a:t>LDS</a:t>
+            </a:r>
+            <a:endParaRPr kumimoji="1" lang="ko-KR" altLang="en-US" sz="800" b="1" i="1" u="sng">
+              <a:solidFill>
+                <a:schemeClr val="tx1"/>
+              </a:solidFill>
+            </a:endParaRPr>
+          </a:p>
+        </p:txBody>
+      </p:sp>
+      <p:sp>
+        <p:nvSpPr>
+          <p:cNvPr id="359" name="모서리가 둥근 직사각형 358">
+            <a:extLst>
+              <a:ext uri="{FF2B5EF4-FFF2-40B4-BE49-F238E27FC236}">
+                <a16:creationId xmlns:a16="http://schemas.microsoft.com/office/drawing/2014/main" id="{14514B2B-A4BF-EF7B-AF22-C22FA2B228B9}"/>
+              </a:ext>
+            </a:extLst>
+          </p:cNvPr>
+          <p:cNvSpPr/>
+          <p:nvPr/>
+        </p:nvSpPr>
+        <p:spPr>
+          <a:xfrm>
+            <a:off x="4537559" y="1272082"/>
+            <a:ext cx="1164463" cy="185590"/>
+          </a:xfrm>
+          <a:prstGeom prst="roundRect">
+            <a:avLst>
+              <a:gd name="adj" fmla="val 12191"/>
+            </a:avLst>
+          </a:prstGeom>
+          <a:noFill/>
+          <a:ln w="12700">
+            <a:noFill/>
+          </a:ln>
+        </p:spPr>
+        <p:style>
+          <a:lnRef idx="2">
+            <a:schemeClr val="accent1">
+              <a:shade val="15000"/>
+            </a:schemeClr>
+          </a:lnRef>
+          <a:fillRef idx="1">
+            <a:schemeClr val="accent1"/>
+          </a:fillRef>
+          <a:effectRef idx="0">
+            <a:schemeClr val="accent1"/>
+          </a:effectRef>
+          <a:fontRef idx="minor">
+            <a:schemeClr val="lt1"/>
+          </a:fontRef>
+        </p:style>
+        <p:txBody>
+          <a:bodyPr rtlCol="0" anchor="ctr"/>
+          <a:lstStyle/>
+          <a:p>
+            <a:r>
+              <a:rPr kumimoji="1" lang="en-US" altLang="ko-KR" sz="800" b="1" i="1" u="sng">
+                <a:solidFill>
+                  <a:schemeClr val="tx1"/>
+                </a:solidFill>
+              </a:rPr>
+              <a:t>RDS</a:t>
+            </a:r>
+            <a:endParaRPr kumimoji="1" lang="ko-KR" altLang="en-US" sz="800" b="1" i="1" u="sng">
+              <a:solidFill>
+                <a:schemeClr val="tx1"/>
+              </a:solidFill>
+            </a:endParaRPr>
+          </a:p>
+        </p:txBody>
+      </p:sp>
+      <p:sp>
+        <p:nvSpPr>
+          <p:cNvPr id="360" name="모서리가 둥근 직사각형 359">
+            <a:extLst>
+              <a:ext uri="{FF2B5EF4-FFF2-40B4-BE49-F238E27FC236}">
+                <a16:creationId xmlns:a16="http://schemas.microsoft.com/office/drawing/2014/main" id="{DBDB8425-D8BE-D7C8-94C5-6A1FE76E1739}"/>
+              </a:ext>
+            </a:extLst>
+          </p:cNvPr>
+          <p:cNvSpPr/>
+          <p:nvPr/>
+        </p:nvSpPr>
+        <p:spPr>
+          <a:xfrm>
+            <a:off x="6467874" y="1272082"/>
+            <a:ext cx="1164463" cy="185590"/>
+          </a:xfrm>
+          <a:prstGeom prst="roundRect">
+            <a:avLst>
+              <a:gd name="adj" fmla="val 12191"/>
+            </a:avLst>
+          </a:prstGeom>
+          <a:noFill/>
+          <a:ln w="12700">
+            <a:noFill/>
+          </a:ln>
+        </p:spPr>
+        <p:style>
+          <a:lnRef idx="2">
+            <a:schemeClr val="accent1">
+              <a:shade val="15000"/>
+            </a:schemeClr>
+          </a:lnRef>
+          <a:fillRef idx="1">
+            <a:schemeClr val="accent1"/>
+          </a:fillRef>
+          <a:effectRef idx="0">
+            <a:schemeClr val="accent1"/>
+          </a:effectRef>
+          <a:fontRef idx="minor">
+            <a:schemeClr val="lt1"/>
+          </a:fontRef>
+        </p:style>
+        <p:txBody>
+          <a:bodyPr rtlCol="0" anchor="ctr"/>
+          <a:lstStyle/>
+          <a:p>
+            <a:r>
+              <a:rPr kumimoji="1" lang="en-US" altLang="ko-KR" sz="800" b="1" i="1" u="sng">
+                <a:solidFill>
+                  <a:schemeClr val="tx1"/>
+                </a:solidFill>
+              </a:rPr>
+              <a:t>CDS</a:t>
+            </a:r>
+            <a:endParaRPr kumimoji="1" lang="ko-KR" altLang="en-US" sz="800" b="1" i="1" u="sng">
+              <a:solidFill>
+                <a:schemeClr val="tx1"/>
+              </a:solidFill>
+            </a:endParaRPr>
+          </a:p>
+        </p:txBody>
+      </p:sp>
+      <p:sp>
+        <p:nvSpPr>
+          <p:cNvPr id="361" name="모서리가 둥근 직사각형 360">
+            <a:extLst>
+              <a:ext uri="{FF2B5EF4-FFF2-40B4-BE49-F238E27FC236}">
+                <a16:creationId xmlns:a16="http://schemas.microsoft.com/office/drawing/2014/main" id="{B5EADE75-E7E0-8971-B2A1-E0F8D0F11F0A}"/>
+              </a:ext>
+            </a:extLst>
+          </p:cNvPr>
+          <p:cNvSpPr/>
+          <p:nvPr/>
+        </p:nvSpPr>
+        <p:spPr>
+          <a:xfrm>
+            <a:off x="8217834" y="1272082"/>
+            <a:ext cx="1164463" cy="185590"/>
+          </a:xfrm>
+          <a:prstGeom prst="roundRect">
+            <a:avLst>
+              <a:gd name="adj" fmla="val 12191"/>
+            </a:avLst>
+          </a:prstGeom>
+          <a:noFill/>
+          <a:ln w="12700">
+            <a:noFill/>
+          </a:ln>
+        </p:spPr>
+        <p:style>
+          <a:lnRef idx="2">
+            <a:schemeClr val="accent1">
+              <a:shade val="15000"/>
+            </a:schemeClr>
+          </a:lnRef>
+          <a:fillRef idx="1">
+            <a:schemeClr val="accent1"/>
+          </a:fillRef>
+          <a:effectRef idx="0">
+            <a:schemeClr val="accent1"/>
+          </a:effectRef>
+          <a:fontRef idx="minor">
+            <a:schemeClr val="lt1"/>
+          </a:fontRef>
+        </p:style>
+        <p:txBody>
+          <a:bodyPr rtlCol="0" anchor="ctr"/>
+          <a:lstStyle/>
+          <a:p>
+            <a:r>
+              <a:rPr kumimoji="1" lang="en-US" altLang="ko-KR" sz="800" b="1" i="1" u="sng">
+                <a:solidFill>
+                  <a:schemeClr val="tx1"/>
+                </a:solidFill>
+              </a:rPr>
+              <a:t>EDS</a:t>
+            </a:r>
+            <a:endParaRPr kumimoji="1" lang="ko-KR" altLang="en-US" sz="800" b="1" i="1" u="sng">
+              <a:solidFill>
+                <a:schemeClr val="tx1"/>
+              </a:solidFill>
+            </a:endParaRPr>
+          </a:p>
+        </p:txBody>
+      </p:sp>
+      <p:sp>
+        <p:nvSpPr>
+          <p:cNvPr id="362" name="모서리가 둥근 직사각형 361">
+            <a:extLst>
+              <a:ext uri="{FF2B5EF4-FFF2-40B4-BE49-F238E27FC236}">
+                <a16:creationId xmlns:a16="http://schemas.microsoft.com/office/drawing/2014/main" id="{819D59DF-EBFD-55D3-BCB3-ED9FFF31F975}"/>
+              </a:ext>
+            </a:extLst>
+          </p:cNvPr>
+          <p:cNvSpPr/>
+          <p:nvPr/>
+        </p:nvSpPr>
+        <p:spPr>
+          <a:xfrm>
+            <a:off x="6683791" y="980188"/>
+            <a:ext cx="1164463" cy="185590"/>
+          </a:xfrm>
+          <a:prstGeom prst="roundRect">
+            <a:avLst>
+              <a:gd name="adj" fmla="val 12191"/>
+            </a:avLst>
+          </a:prstGeom>
+          <a:noFill/>
+          <a:ln w="12700">
+            <a:noFill/>
+          </a:ln>
+        </p:spPr>
+        <p:style>
+          <a:lnRef idx="2">
+            <a:schemeClr val="accent1">
+              <a:shade val="15000"/>
+            </a:schemeClr>
+          </a:lnRef>
+          <a:fillRef idx="1">
+            <a:schemeClr val="accent1"/>
+          </a:fillRef>
+          <a:effectRef idx="0">
+            <a:schemeClr val="accent1"/>
+          </a:effectRef>
+          <a:fontRef idx="minor">
+            <a:schemeClr val="lt1"/>
+          </a:fontRef>
+        </p:style>
+        <p:txBody>
+          <a:bodyPr rtlCol="0" anchor="ctr"/>
+          <a:lstStyle/>
+          <a:p>
+            <a:r>
+              <a:rPr kumimoji="1" lang="en-US" altLang="ko-KR" sz="800" b="1" i="1" u="sng">
+                <a:solidFill>
+                  <a:schemeClr val="tx1"/>
+                </a:solidFill>
+              </a:rPr>
+              <a:t>SDS</a:t>
+            </a:r>
+            <a:endParaRPr kumimoji="1" lang="ko-KR" altLang="en-US" sz="800" b="1" i="1" u="sng">
+              <a:solidFill>
+                <a:schemeClr val="tx1"/>
+              </a:solidFill>
+            </a:endParaRPr>
+          </a:p>
+        </p:txBody>
+      </p:sp>
+    </p:spTree>
+    <p:extLst>
+      <p:ext uri="{BB962C8B-B14F-4D97-AF65-F5344CB8AC3E}">
+        <p14:creationId xmlns:p14="http://schemas.microsoft.com/office/powerpoint/2010/main" val="1985729203"/>
+      </p:ext>
+    </p:extLst>
+  </p:cSld>
+  <p:clrMapOvr>
+    <a:masterClrMapping/>
+  </p:clrMapOvr>
+</p:sld>
+</file>
+
+<file path=ppt/slides/slide4.xml><?xml version="1.0" encoding="utf-8"?>
 <p:sld xmlns:a="http://schemas.openxmlformats.org/drawingml/2006/main" xmlns:r="http://schemas.openxmlformats.org/officeDocument/2006/relationships" xmlns:p="http://schemas.openxmlformats.org/presentationml/2006/main">
   <p:cSld>
     <p:spTree>
